--- a/source/layout.pptx
+++ b/source/layout.pptx
@@ -104,6 +104,11 @@
       </a:defRPr>
     </a:lvl9pPr>
   </p:defaultTextStyle>
+  <p:extLst>
+    <p:ext uri="{EFAFB233-063F-42B5-8137-9DF3F51BA10A}">
+      <p15:sldGuideLst xmlns:p15="http://schemas.microsoft.com/office/powerpoint/2012/main"/>
+    </p:ext>
+  </p:extLst>
 </p:presentation>
 </file>
 
@@ -254,7 +259,7 @@
           <a:p>
             <a:fld id="{D807E52F-525B-4E79-BB2A-CC4327EEE1A6}" type="datetimeFigureOut">
               <a:rPr lang="zh-CN" altLang="en-US" smtClean="0"/>
-              <a:t>2025/12/9</a:t>
+              <a:t>2025/12/16</a:t>
             </a:fld>
             <a:endParaRPr lang="zh-CN" altLang="en-US"/>
           </a:p>
@@ -452,7 +457,7 @@
           <a:p>
             <a:fld id="{D807E52F-525B-4E79-BB2A-CC4327EEE1A6}" type="datetimeFigureOut">
               <a:rPr lang="zh-CN" altLang="en-US" smtClean="0"/>
-              <a:t>2025/12/9</a:t>
+              <a:t>2025/12/16</a:t>
             </a:fld>
             <a:endParaRPr lang="zh-CN" altLang="en-US"/>
           </a:p>
@@ -660,7 +665,7 @@
           <a:p>
             <a:fld id="{D807E52F-525B-4E79-BB2A-CC4327EEE1A6}" type="datetimeFigureOut">
               <a:rPr lang="zh-CN" altLang="en-US" smtClean="0"/>
-              <a:t>2025/12/9</a:t>
+              <a:t>2025/12/16</a:t>
             </a:fld>
             <a:endParaRPr lang="zh-CN" altLang="en-US"/>
           </a:p>
@@ -858,7 +863,7 @@
           <a:p>
             <a:fld id="{D807E52F-525B-4E79-BB2A-CC4327EEE1A6}" type="datetimeFigureOut">
               <a:rPr lang="zh-CN" altLang="en-US" smtClean="0"/>
-              <a:t>2025/12/9</a:t>
+              <a:t>2025/12/16</a:t>
             </a:fld>
             <a:endParaRPr lang="zh-CN" altLang="en-US"/>
           </a:p>
@@ -1133,7 +1138,7 @@
           <a:p>
             <a:fld id="{D807E52F-525B-4E79-BB2A-CC4327EEE1A6}" type="datetimeFigureOut">
               <a:rPr lang="zh-CN" altLang="en-US" smtClean="0"/>
-              <a:t>2025/12/9</a:t>
+              <a:t>2025/12/16</a:t>
             </a:fld>
             <a:endParaRPr lang="zh-CN" altLang="en-US"/>
           </a:p>
@@ -1398,7 +1403,7 @@
           <a:p>
             <a:fld id="{D807E52F-525B-4E79-BB2A-CC4327EEE1A6}" type="datetimeFigureOut">
               <a:rPr lang="zh-CN" altLang="en-US" smtClean="0"/>
-              <a:t>2025/12/9</a:t>
+              <a:t>2025/12/16</a:t>
             </a:fld>
             <a:endParaRPr lang="zh-CN" altLang="en-US"/>
           </a:p>
@@ -1810,7 +1815,7 @@
           <a:p>
             <a:fld id="{D807E52F-525B-4E79-BB2A-CC4327EEE1A6}" type="datetimeFigureOut">
               <a:rPr lang="zh-CN" altLang="en-US" smtClean="0"/>
-              <a:t>2025/12/9</a:t>
+              <a:t>2025/12/16</a:t>
             </a:fld>
             <a:endParaRPr lang="zh-CN" altLang="en-US"/>
           </a:p>
@@ -1951,7 +1956,7 @@
           <a:p>
             <a:fld id="{D807E52F-525B-4E79-BB2A-CC4327EEE1A6}" type="datetimeFigureOut">
               <a:rPr lang="zh-CN" altLang="en-US" smtClean="0"/>
-              <a:t>2025/12/9</a:t>
+              <a:t>2025/12/16</a:t>
             </a:fld>
             <a:endParaRPr lang="zh-CN" altLang="en-US"/>
           </a:p>
@@ -2064,7 +2069,7 @@
           <a:p>
             <a:fld id="{D807E52F-525B-4E79-BB2A-CC4327EEE1A6}" type="datetimeFigureOut">
               <a:rPr lang="zh-CN" altLang="en-US" smtClean="0"/>
-              <a:t>2025/12/9</a:t>
+              <a:t>2025/12/16</a:t>
             </a:fld>
             <a:endParaRPr lang="zh-CN" altLang="en-US"/>
           </a:p>
@@ -2375,7 +2380,7 @@
           <a:p>
             <a:fld id="{D807E52F-525B-4E79-BB2A-CC4327EEE1A6}" type="datetimeFigureOut">
               <a:rPr lang="zh-CN" altLang="en-US" smtClean="0"/>
-              <a:t>2025/12/9</a:t>
+              <a:t>2025/12/16</a:t>
             </a:fld>
             <a:endParaRPr lang="zh-CN" altLang="en-US"/>
           </a:p>
@@ -2663,7 +2668,7 @@
           <a:p>
             <a:fld id="{D807E52F-525B-4E79-BB2A-CC4327EEE1A6}" type="datetimeFigureOut">
               <a:rPr lang="zh-CN" altLang="en-US" smtClean="0"/>
-              <a:t>2025/12/9</a:t>
+              <a:t>2025/12/16</a:t>
             </a:fld>
             <a:endParaRPr lang="zh-CN" altLang="en-US"/>
           </a:p>
@@ -2904,7 +2909,7 @@
           <a:p>
             <a:fld id="{D807E52F-525B-4E79-BB2A-CC4327EEE1A6}" type="datetimeFigureOut">
               <a:rPr lang="zh-CN" altLang="en-US" smtClean="0"/>
-              <a:t>2025/12/9</a:t>
+              <a:t>2025/12/16</a:t>
             </a:fld>
             <a:endParaRPr lang="zh-CN" altLang="en-US"/>
           </a:p>
@@ -3336,7 +3341,7 @@
           <p:nvPr>
             <p:extLst>
               <p:ext uri="{D42A27DB-BD31-4B8C-83A1-F6EECF244321}">
-                <p14:modId xmlns:p14="http://schemas.microsoft.com/office/powerpoint/2010/main" val="2133468935"/>
+                <p14:modId xmlns:p14="http://schemas.microsoft.com/office/powerpoint/2010/main" val="3609523108"/>
               </p:ext>
             </p:extLst>
           </p:nvPr>
@@ -6643,10 +6648,16 @@
           <a:p>
             <a:pPr algn="ctr"/>
             <a:r>
-              <a:rPr lang="en-US" altLang="zh-CN" sz="1100" dirty="0"/>
+              <a:rPr lang="en-US" altLang="zh-CN" sz="1100" dirty="0">
+                <a:latin typeface="Times New Roman" panose="02020603050405020304" pitchFamily="18" charset="0"/>
+                <a:cs typeface="Times New Roman" panose="02020603050405020304" pitchFamily="18" charset="0"/>
+              </a:rPr>
               <a:t>0</a:t>
             </a:r>
-            <a:endParaRPr lang="zh-CN" altLang="en-US" sz="1100" dirty="0"/>
+            <a:endParaRPr lang="zh-CN" altLang="en-US" sz="1100" dirty="0">
+              <a:latin typeface="Times New Roman" panose="02020603050405020304" pitchFamily="18" charset="0"/>
+              <a:cs typeface="Times New Roman" panose="02020603050405020304" pitchFamily="18" charset="0"/>
+            </a:endParaRPr>
           </a:p>
         </p:txBody>
       </p:sp>
@@ -6680,10 +6691,16 @@
           <a:p>
             <a:pPr algn="ctr"/>
             <a:r>
-              <a:rPr lang="en-US" altLang="zh-CN" sz="1100" dirty="0"/>
+              <a:rPr lang="en-US" altLang="zh-CN" sz="1100" dirty="0">
+                <a:latin typeface="Times New Roman" panose="02020603050405020304" pitchFamily="18" charset="0"/>
+                <a:cs typeface="Times New Roman" panose="02020603050405020304" pitchFamily="18" charset="0"/>
+              </a:rPr>
               <a:t>1</a:t>
             </a:r>
-            <a:endParaRPr lang="zh-CN" altLang="en-US" sz="1100" dirty="0"/>
+            <a:endParaRPr lang="zh-CN" altLang="en-US" sz="1100" dirty="0">
+              <a:latin typeface="Times New Roman" panose="02020603050405020304" pitchFamily="18" charset="0"/>
+              <a:cs typeface="Times New Roman" panose="02020603050405020304" pitchFamily="18" charset="0"/>
+            </a:endParaRPr>
           </a:p>
         </p:txBody>
       </p:sp>
@@ -6717,10 +6734,16 @@
           <a:p>
             <a:pPr algn="ctr"/>
             <a:r>
-              <a:rPr lang="en-US" altLang="zh-CN" sz="1100" dirty="0"/>
+              <a:rPr lang="en-US" altLang="zh-CN" sz="1100" dirty="0">
+                <a:latin typeface="Times New Roman" panose="02020603050405020304" pitchFamily="18" charset="0"/>
+                <a:cs typeface="Times New Roman" panose="02020603050405020304" pitchFamily="18" charset="0"/>
+              </a:rPr>
               <a:t>2</a:t>
             </a:r>
-            <a:endParaRPr lang="zh-CN" altLang="en-US" sz="1100" dirty="0"/>
+            <a:endParaRPr lang="zh-CN" altLang="en-US" sz="1100" dirty="0">
+              <a:latin typeface="Times New Roman" panose="02020603050405020304" pitchFamily="18" charset="0"/>
+              <a:cs typeface="Times New Roman" panose="02020603050405020304" pitchFamily="18" charset="0"/>
+            </a:endParaRPr>
           </a:p>
         </p:txBody>
       </p:sp>
@@ -6754,10 +6777,16 @@
           <a:p>
             <a:pPr algn="ctr"/>
             <a:r>
-              <a:rPr lang="en-US" altLang="zh-CN" sz="1100" dirty="0"/>
+              <a:rPr lang="en-US" altLang="zh-CN" sz="1100" dirty="0">
+                <a:latin typeface="Times New Roman" panose="02020603050405020304" pitchFamily="18" charset="0"/>
+                <a:cs typeface="Times New Roman" panose="02020603050405020304" pitchFamily="18" charset="0"/>
+              </a:rPr>
               <a:t>3</a:t>
             </a:r>
-            <a:endParaRPr lang="zh-CN" altLang="en-US" sz="1100" dirty="0"/>
+            <a:endParaRPr lang="zh-CN" altLang="en-US" sz="1100" dirty="0">
+              <a:latin typeface="Times New Roman" panose="02020603050405020304" pitchFamily="18" charset="0"/>
+              <a:cs typeface="Times New Roman" panose="02020603050405020304" pitchFamily="18" charset="0"/>
+            </a:endParaRPr>
           </a:p>
         </p:txBody>
       </p:sp>
@@ -6791,10 +6820,16 @@
           <a:p>
             <a:pPr algn="ctr"/>
             <a:r>
-              <a:rPr lang="en-US" altLang="zh-CN" sz="1100" dirty="0"/>
+              <a:rPr lang="en-US" altLang="zh-CN" sz="1100" dirty="0">
+                <a:latin typeface="Times New Roman" panose="02020603050405020304" pitchFamily="18" charset="0"/>
+                <a:cs typeface="Times New Roman" panose="02020603050405020304" pitchFamily="18" charset="0"/>
+              </a:rPr>
               <a:t>4</a:t>
             </a:r>
-            <a:endParaRPr lang="zh-CN" altLang="en-US" sz="1100" dirty="0"/>
+            <a:endParaRPr lang="zh-CN" altLang="en-US" sz="1100" dirty="0">
+              <a:latin typeface="Times New Roman" panose="02020603050405020304" pitchFamily="18" charset="0"/>
+              <a:cs typeface="Times New Roman" panose="02020603050405020304" pitchFamily="18" charset="0"/>
+            </a:endParaRPr>
           </a:p>
         </p:txBody>
       </p:sp>
@@ -6828,10 +6863,16 @@
           <a:p>
             <a:pPr algn="ctr"/>
             <a:r>
-              <a:rPr lang="en-US" altLang="zh-CN" sz="1100" dirty="0"/>
+              <a:rPr lang="en-US" altLang="zh-CN" sz="1100" dirty="0">
+                <a:latin typeface="Times New Roman" panose="02020603050405020304" pitchFamily="18" charset="0"/>
+                <a:cs typeface="Times New Roman" panose="02020603050405020304" pitchFamily="18" charset="0"/>
+              </a:rPr>
               <a:t>5</a:t>
             </a:r>
-            <a:endParaRPr lang="zh-CN" altLang="en-US" sz="1100" dirty="0"/>
+            <a:endParaRPr lang="zh-CN" altLang="en-US" sz="1100" dirty="0">
+              <a:latin typeface="Times New Roman" panose="02020603050405020304" pitchFamily="18" charset="0"/>
+              <a:cs typeface="Times New Roman" panose="02020603050405020304" pitchFamily="18" charset="0"/>
+            </a:endParaRPr>
           </a:p>
         </p:txBody>
       </p:sp>
@@ -6865,10 +6906,16 @@
           <a:p>
             <a:pPr algn="ctr"/>
             <a:r>
-              <a:rPr lang="en-US" altLang="zh-CN" sz="1100" dirty="0"/>
+              <a:rPr lang="en-US" altLang="zh-CN" sz="1100" dirty="0">
+                <a:latin typeface="Times New Roman" panose="02020603050405020304" pitchFamily="18" charset="0"/>
+                <a:cs typeface="Times New Roman" panose="02020603050405020304" pitchFamily="18" charset="0"/>
+              </a:rPr>
               <a:t>6</a:t>
             </a:r>
-            <a:endParaRPr lang="zh-CN" altLang="en-US" sz="1100" dirty="0"/>
+            <a:endParaRPr lang="zh-CN" altLang="en-US" sz="1100" dirty="0">
+              <a:latin typeface="Times New Roman" panose="02020603050405020304" pitchFamily="18" charset="0"/>
+              <a:cs typeface="Times New Roman" panose="02020603050405020304" pitchFamily="18" charset="0"/>
+            </a:endParaRPr>
           </a:p>
         </p:txBody>
       </p:sp>
@@ -6902,10 +6949,16 @@
           <a:p>
             <a:pPr algn="ctr"/>
             <a:r>
-              <a:rPr lang="en-US" altLang="zh-CN" sz="1100" dirty="0"/>
+              <a:rPr lang="en-US" altLang="zh-CN" sz="1100" dirty="0">
+                <a:latin typeface="Times New Roman" panose="02020603050405020304" pitchFamily="18" charset="0"/>
+                <a:cs typeface="Times New Roman" panose="02020603050405020304" pitchFamily="18" charset="0"/>
+              </a:rPr>
               <a:t>7</a:t>
             </a:r>
-            <a:endParaRPr lang="zh-CN" altLang="en-US" sz="1100" dirty="0"/>
+            <a:endParaRPr lang="zh-CN" altLang="en-US" sz="1100" dirty="0">
+              <a:latin typeface="Times New Roman" panose="02020603050405020304" pitchFamily="18" charset="0"/>
+              <a:cs typeface="Times New Roman" panose="02020603050405020304" pitchFamily="18" charset="0"/>
+            </a:endParaRPr>
           </a:p>
         </p:txBody>
       </p:sp>
@@ -7001,10 +7054,16 @@
             <a:p>
               <a:pPr algn="ctr"/>
               <a:r>
-                <a:rPr lang="en-US" altLang="zh-CN" sz="1100" dirty="0" err="1"/>
+                <a:rPr lang="en-US" altLang="zh-CN" sz="1100" dirty="0" err="1">
+                  <a:latin typeface="Times New Roman" panose="02020603050405020304" pitchFamily="18" charset="0"/>
+                  <a:cs typeface="Times New Roman" panose="02020603050405020304" pitchFamily="18" charset="0"/>
+                </a:rPr>
                 <a:t>VL_reduce</a:t>
               </a:r>
-              <a:endParaRPr lang="zh-CN" altLang="en-US" sz="1100" dirty="0"/>
+              <a:endParaRPr lang="zh-CN" altLang="en-US" sz="1100" dirty="0">
+                <a:latin typeface="Times New Roman" panose="02020603050405020304" pitchFamily="18" charset="0"/>
+                <a:cs typeface="Times New Roman" panose="02020603050405020304" pitchFamily="18" charset="0"/>
+              </a:endParaRPr>
             </a:p>
           </p:txBody>
         </p:sp>
@@ -7081,10 +7140,16 @@
           <a:p>
             <a:pPr algn="ctr"/>
             <a:r>
-              <a:rPr lang="en-US" altLang="zh-CN" sz="1100" dirty="0"/>
+              <a:rPr lang="en-US" altLang="zh-CN" sz="1100" dirty="0">
+                <a:latin typeface="Times New Roman" panose="02020603050405020304" pitchFamily="18" charset="0"/>
+                <a:cs typeface="Times New Roman" panose="02020603050405020304" pitchFamily="18" charset="0"/>
+              </a:rPr>
               <a:t>M</a:t>
             </a:r>
-            <a:endParaRPr lang="zh-CN" altLang="en-US" sz="1100" dirty="0"/>
+            <a:endParaRPr lang="zh-CN" altLang="en-US" sz="1100" dirty="0">
+              <a:latin typeface="Times New Roman" panose="02020603050405020304" pitchFamily="18" charset="0"/>
+              <a:cs typeface="Times New Roman" panose="02020603050405020304" pitchFamily="18" charset="0"/>
+            </a:endParaRPr>
           </a:p>
         </p:txBody>
       </p:sp>
@@ -7160,10 +7225,16 @@
           <a:p>
             <a:pPr algn="ctr"/>
             <a:r>
-              <a:rPr lang="en-US" altLang="zh-CN" sz="1100" dirty="0"/>
+              <a:rPr lang="en-US" altLang="zh-CN" sz="1100" dirty="0">
+                <a:latin typeface="Times New Roman" panose="02020603050405020304" pitchFamily="18" charset="0"/>
+                <a:cs typeface="Times New Roman" panose="02020603050405020304" pitchFamily="18" charset="0"/>
+              </a:rPr>
               <a:t>way</a:t>
             </a:r>
-            <a:endParaRPr lang="zh-CN" altLang="en-US" sz="1100" dirty="0"/>
+            <a:endParaRPr lang="zh-CN" altLang="en-US" sz="1100" dirty="0">
+              <a:latin typeface="Times New Roman" panose="02020603050405020304" pitchFamily="18" charset="0"/>
+              <a:cs typeface="Times New Roman" panose="02020603050405020304" pitchFamily="18" charset="0"/>
+            </a:endParaRPr>
           </a:p>
         </p:txBody>
       </p:sp>
@@ -7182,7 +7253,7 @@
           <p:nvPr>
             <p:extLst>
               <p:ext uri="{D42A27DB-BD31-4B8C-83A1-F6EECF244321}">
-                <p14:modId xmlns:p14="http://schemas.microsoft.com/office/powerpoint/2010/main" val="1156885190"/>
+                <p14:modId xmlns:p14="http://schemas.microsoft.com/office/powerpoint/2010/main" val="2165931676"/>
               </p:ext>
             </p:extLst>
           </p:nvPr>
@@ -10583,10 +10654,16 @@
             <a:p>
               <a:pPr algn="ctr"/>
               <a:r>
-                <a:rPr lang="en-US" altLang="zh-CN" sz="1100" dirty="0"/>
+                <a:rPr lang="en-US" altLang="zh-CN" sz="1100" dirty="0">
+                  <a:latin typeface="Times New Roman" panose="02020603050405020304" pitchFamily="18" charset="0"/>
+                  <a:cs typeface="Times New Roman" panose="02020603050405020304" pitchFamily="18" charset="0"/>
+                </a:rPr>
                 <a:t>way</a:t>
               </a:r>
-              <a:endParaRPr lang="zh-CN" altLang="en-US" sz="1100" dirty="0"/>
+              <a:endParaRPr lang="zh-CN" altLang="en-US" sz="1100" dirty="0">
+                <a:latin typeface="Times New Roman" panose="02020603050405020304" pitchFamily="18" charset="0"/>
+                <a:cs typeface="Times New Roman" panose="02020603050405020304" pitchFamily="18" charset="0"/>
+              </a:endParaRPr>
             </a:p>
           </p:txBody>
         </p:sp>
@@ -10605,10 +10682,10 @@
         </p:nvGrpSpPr>
         <p:grpSpPr>
           <a:xfrm rot="5400000">
-            <a:off x="4720093" y="-71908"/>
-            <a:ext cx="200522" cy="742950"/>
-            <a:chOff x="1752103" y="702470"/>
-            <a:chExt cx="200522" cy="742950"/>
+            <a:off x="4720093" y="-71909"/>
+            <a:ext cx="200523" cy="742950"/>
+            <a:chOff x="1752102" y="702470"/>
+            <a:chExt cx="200523" cy="742950"/>
           </a:xfrm>
         </p:grpSpPr>
         <p:cxnSp>
@@ -10667,7 +10744,7 @@
           </p:nvSpPr>
           <p:spPr>
             <a:xfrm>
-              <a:off x="1752103" y="702470"/>
+              <a:off x="1752102" y="702470"/>
               <a:ext cx="169277" cy="742950"/>
             </a:xfrm>
             <a:prstGeom prst="rect">
@@ -10683,10 +10760,16 @@
             <a:p>
               <a:pPr algn="ctr"/>
               <a:r>
-                <a:rPr lang="en-US" altLang="zh-CN" sz="1100" dirty="0" err="1"/>
+                <a:rPr lang="en-US" altLang="zh-CN" sz="1100" dirty="0" err="1">
+                  <a:latin typeface="Times New Roman" panose="02020603050405020304" pitchFamily="18" charset="0"/>
+                  <a:cs typeface="Times New Roman" panose="02020603050405020304" pitchFamily="18" charset="0"/>
+                </a:rPr>
                 <a:t>VL_reduce</a:t>
               </a:r>
-              <a:endParaRPr lang="zh-CN" altLang="en-US" sz="1100" dirty="0"/>
+              <a:endParaRPr lang="zh-CN" altLang="en-US" sz="1100" dirty="0">
+                <a:latin typeface="Times New Roman" panose="02020603050405020304" pitchFamily="18" charset="0"/>
+                <a:cs typeface="Times New Roman" panose="02020603050405020304" pitchFamily="18" charset="0"/>
+              </a:endParaRPr>
             </a:p>
           </p:txBody>
         </p:sp>
@@ -10763,10 +10846,16 @@
           <a:p>
             <a:pPr algn="ctr"/>
             <a:r>
-              <a:rPr lang="en-US" altLang="zh-CN" sz="1100" dirty="0"/>
+              <a:rPr lang="en-US" altLang="zh-CN" sz="1100" dirty="0">
+                <a:latin typeface="Times New Roman" panose="02020603050405020304" pitchFamily="18" charset="0"/>
+                <a:cs typeface="Times New Roman" panose="02020603050405020304" pitchFamily="18" charset="0"/>
+              </a:rPr>
               <a:t>K</a:t>
             </a:r>
-            <a:endParaRPr lang="zh-CN" altLang="en-US" sz="1100" dirty="0"/>
+            <a:endParaRPr lang="zh-CN" altLang="en-US" sz="1100" dirty="0">
+              <a:latin typeface="Times New Roman" panose="02020603050405020304" pitchFamily="18" charset="0"/>
+              <a:cs typeface="Times New Roman" panose="02020603050405020304" pitchFamily="18" charset="0"/>
+            </a:endParaRPr>
           </a:p>
         </p:txBody>
       </p:sp>
@@ -10820,10 +10909,16 @@
             <a:p>
               <a:pPr algn="ctr"/>
               <a:r>
-                <a:rPr lang="en-US" altLang="zh-CN" sz="1100" dirty="0"/>
+                <a:rPr lang="en-US" altLang="zh-CN" sz="1100" dirty="0">
+                  <a:latin typeface="Times New Roman" panose="02020603050405020304" pitchFamily="18" charset="0"/>
+                  <a:cs typeface="Times New Roman" panose="02020603050405020304" pitchFamily="18" charset="0"/>
+                </a:rPr>
                 <a:t>1</a:t>
               </a:r>
-              <a:endParaRPr lang="zh-CN" altLang="en-US" sz="1100" dirty="0"/>
+              <a:endParaRPr lang="zh-CN" altLang="en-US" sz="1100" dirty="0">
+                <a:latin typeface="Times New Roman" panose="02020603050405020304" pitchFamily="18" charset="0"/>
+                <a:cs typeface="Times New Roman" panose="02020603050405020304" pitchFamily="18" charset="0"/>
+              </a:endParaRPr>
             </a:p>
           </p:txBody>
         </p:sp>
@@ -10857,10 +10952,16 @@
             <a:p>
               <a:pPr algn="ctr"/>
               <a:r>
-                <a:rPr lang="en-US" altLang="zh-CN" sz="1100" dirty="0"/>
+                <a:rPr lang="en-US" altLang="zh-CN" sz="1100" dirty="0">
+                  <a:latin typeface="Times New Roman" panose="02020603050405020304" pitchFamily="18" charset="0"/>
+                  <a:cs typeface="Times New Roman" panose="02020603050405020304" pitchFamily="18" charset="0"/>
+                </a:rPr>
                 <a:t>0</a:t>
               </a:r>
-              <a:endParaRPr lang="zh-CN" altLang="en-US" sz="1100" dirty="0"/>
+              <a:endParaRPr lang="zh-CN" altLang="en-US" sz="1100" dirty="0">
+                <a:latin typeface="Times New Roman" panose="02020603050405020304" pitchFamily="18" charset="0"/>
+                <a:cs typeface="Times New Roman" panose="02020603050405020304" pitchFamily="18" charset="0"/>
+              </a:endParaRPr>
             </a:p>
           </p:txBody>
         </p:sp>
@@ -10894,10 +10995,16 @@
             <a:p>
               <a:pPr algn="ctr"/>
               <a:r>
-                <a:rPr lang="en-US" altLang="zh-CN" sz="1100" dirty="0"/>
+                <a:rPr lang="en-US" altLang="zh-CN" sz="1100" dirty="0">
+                  <a:latin typeface="Times New Roman" panose="02020603050405020304" pitchFamily="18" charset="0"/>
+                  <a:cs typeface="Times New Roman" panose="02020603050405020304" pitchFamily="18" charset="0"/>
+                </a:rPr>
                 <a:t>3</a:t>
               </a:r>
-              <a:endParaRPr lang="zh-CN" altLang="en-US" sz="1100" dirty="0"/>
+              <a:endParaRPr lang="zh-CN" altLang="en-US" sz="1100" dirty="0">
+                <a:latin typeface="Times New Roman" panose="02020603050405020304" pitchFamily="18" charset="0"/>
+                <a:cs typeface="Times New Roman" panose="02020603050405020304" pitchFamily="18" charset="0"/>
+              </a:endParaRPr>
             </a:p>
           </p:txBody>
         </p:sp>
@@ -10931,10 +11038,16 @@
             <a:p>
               <a:pPr algn="ctr"/>
               <a:r>
-                <a:rPr lang="en-US" altLang="zh-CN" sz="1100" dirty="0"/>
+                <a:rPr lang="en-US" altLang="zh-CN" sz="1100" dirty="0">
+                  <a:latin typeface="Times New Roman" panose="02020603050405020304" pitchFamily="18" charset="0"/>
+                  <a:cs typeface="Times New Roman" panose="02020603050405020304" pitchFamily="18" charset="0"/>
+                </a:rPr>
                 <a:t>2</a:t>
               </a:r>
-              <a:endParaRPr lang="zh-CN" altLang="en-US" sz="1100" dirty="0"/>
+              <a:endParaRPr lang="zh-CN" altLang="en-US" sz="1100" dirty="0">
+                <a:latin typeface="Times New Roman" panose="02020603050405020304" pitchFamily="18" charset="0"/>
+                <a:cs typeface="Times New Roman" panose="02020603050405020304" pitchFamily="18" charset="0"/>
+              </a:endParaRPr>
             </a:p>
           </p:txBody>
         </p:sp>
@@ -10968,10 +11081,16 @@
             <a:p>
               <a:pPr algn="ctr"/>
               <a:r>
-                <a:rPr lang="en-US" altLang="zh-CN" sz="1100" dirty="0"/>
+                <a:rPr lang="en-US" altLang="zh-CN" sz="1100" dirty="0">
+                  <a:latin typeface="Times New Roman" panose="02020603050405020304" pitchFamily="18" charset="0"/>
+                  <a:cs typeface="Times New Roman" panose="02020603050405020304" pitchFamily="18" charset="0"/>
+                </a:rPr>
                 <a:t>5</a:t>
               </a:r>
-              <a:endParaRPr lang="zh-CN" altLang="en-US" sz="1100" dirty="0"/>
+              <a:endParaRPr lang="zh-CN" altLang="en-US" sz="1100" dirty="0">
+                <a:latin typeface="Times New Roman" panose="02020603050405020304" pitchFamily="18" charset="0"/>
+                <a:cs typeface="Times New Roman" panose="02020603050405020304" pitchFamily="18" charset="0"/>
+              </a:endParaRPr>
             </a:p>
           </p:txBody>
         </p:sp>
@@ -11005,10 +11124,16 @@
             <a:p>
               <a:pPr algn="ctr"/>
               <a:r>
-                <a:rPr lang="en-US" altLang="zh-CN" sz="1100" dirty="0"/>
+                <a:rPr lang="en-US" altLang="zh-CN" sz="1100" dirty="0">
+                  <a:latin typeface="Times New Roman" panose="02020603050405020304" pitchFamily="18" charset="0"/>
+                  <a:cs typeface="Times New Roman" panose="02020603050405020304" pitchFamily="18" charset="0"/>
+                </a:rPr>
                 <a:t>4</a:t>
               </a:r>
-              <a:endParaRPr lang="zh-CN" altLang="en-US" sz="1100" dirty="0"/>
+              <a:endParaRPr lang="zh-CN" altLang="en-US" sz="1100" dirty="0">
+                <a:latin typeface="Times New Roman" panose="02020603050405020304" pitchFamily="18" charset="0"/>
+                <a:cs typeface="Times New Roman" panose="02020603050405020304" pitchFamily="18" charset="0"/>
+              </a:endParaRPr>
             </a:p>
           </p:txBody>
         </p:sp>
@@ -11042,10 +11167,16 @@
             <a:p>
               <a:pPr algn="ctr"/>
               <a:r>
-                <a:rPr lang="en-US" altLang="zh-CN" sz="1100" dirty="0"/>
+                <a:rPr lang="en-US" altLang="zh-CN" sz="1100" dirty="0">
+                  <a:latin typeface="Times New Roman" panose="02020603050405020304" pitchFamily="18" charset="0"/>
+                  <a:cs typeface="Times New Roman" panose="02020603050405020304" pitchFamily="18" charset="0"/>
+                </a:rPr>
                 <a:t>7</a:t>
               </a:r>
-              <a:endParaRPr lang="zh-CN" altLang="en-US" sz="1100" dirty="0"/>
+              <a:endParaRPr lang="zh-CN" altLang="en-US" sz="1100" dirty="0">
+                <a:latin typeface="Times New Roman" panose="02020603050405020304" pitchFamily="18" charset="0"/>
+                <a:cs typeface="Times New Roman" panose="02020603050405020304" pitchFamily="18" charset="0"/>
+              </a:endParaRPr>
             </a:p>
           </p:txBody>
         </p:sp>
@@ -11079,10 +11210,16 @@
             <a:p>
               <a:pPr algn="ctr"/>
               <a:r>
-                <a:rPr lang="en-US" altLang="zh-CN" sz="1100" dirty="0"/>
+                <a:rPr lang="en-US" altLang="zh-CN" sz="1100" dirty="0">
+                  <a:latin typeface="Times New Roman" panose="02020603050405020304" pitchFamily="18" charset="0"/>
+                  <a:cs typeface="Times New Roman" panose="02020603050405020304" pitchFamily="18" charset="0"/>
+                </a:rPr>
                 <a:t>6</a:t>
               </a:r>
-              <a:endParaRPr lang="zh-CN" altLang="en-US" sz="1100" dirty="0"/>
+              <a:endParaRPr lang="zh-CN" altLang="en-US" sz="1100" dirty="0">
+                <a:latin typeface="Times New Roman" panose="02020603050405020304" pitchFamily="18" charset="0"/>
+                <a:cs typeface="Times New Roman" panose="02020603050405020304" pitchFamily="18" charset="0"/>
+              </a:endParaRPr>
             </a:p>
           </p:txBody>
         </p:sp>
@@ -11135,7 +11272,10 @@
           <a:lstStyle/>
           <a:p>
             <a:pPr algn="ctr"/>
-            <a:endParaRPr lang="zh-CN" altLang="en-US"/>
+            <a:endParaRPr lang="zh-CN" altLang="en-US">
+              <a:latin typeface="Times New Roman" panose="02020603050405020304" pitchFamily="18" charset="0"/>
+              <a:cs typeface="Times New Roman" panose="02020603050405020304" pitchFamily="18" charset="0"/>
+            </a:endParaRPr>
           </a:p>
         </p:txBody>
       </p:sp>
@@ -11187,7 +11327,10 @@
           <a:lstStyle/>
           <a:p>
             <a:pPr algn="ctr"/>
-            <a:endParaRPr lang="zh-CN" altLang="en-US"/>
+            <a:endParaRPr lang="zh-CN" altLang="en-US">
+              <a:latin typeface="Times New Roman" panose="02020603050405020304" pitchFamily="18" charset="0"/>
+              <a:cs typeface="Times New Roman" panose="02020603050405020304" pitchFamily="18" charset="0"/>
+            </a:endParaRPr>
           </a:p>
         </p:txBody>
       </p:sp>
@@ -11205,8 +11348,8 @@
         </p:nvSpPr>
         <p:spPr>
           <a:xfrm>
-            <a:off x="1934770" y="1936750"/>
-            <a:ext cx="1603324" cy="307777"/>
+            <a:off x="2069422" y="1936750"/>
+            <a:ext cx="1334020" cy="276999"/>
           </a:xfrm>
           <a:prstGeom prst="rect">
             <a:avLst/>
@@ -11221,10 +11364,16 @@
           <a:p>
             <a:pPr algn="ctr"/>
             <a:r>
-              <a:rPr lang="en-US" altLang="zh-CN" sz="1400" dirty="0"/>
+              <a:rPr lang="en-US" altLang="zh-CN" sz="1200" dirty="0">
+                <a:latin typeface="Times New Roman" panose="02020603050405020304" pitchFamily="18" charset="0"/>
+                <a:cs typeface="Times New Roman" panose="02020603050405020304" pitchFamily="18" charset="0"/>
+              </a:rPr>
               <a:t>(a) row-tile format</a:t>
             </a:r>
-            <a:endParaRPr lang="zh-CN" altLang="en-US" sz="1400" dirty="0"/>
+            <a:endParaRPr lang="zh-CN" altLang="en-US" sz="1200" dirty="0">
+              <a:latin typeface="Times New Roman" panose="02020603050405020304" pitchFamily="18" charset="0"/>
+              <a:cs typeface="Times New Roman" panose="02020603050405020304" pitchFamily="18" charset="0"/>
+            </a:endParaRPr>
           </a:p>
         </p:txBody>
       </p:sp>
@@ -11242,8 +11391,8 @@
         </p:nvSpPr>
         <p:spPr>
           <a:xfrm>
-            <a:off x="4213932" y="1960880"/>
-            <a:ext cx="1901483" cy="307777"/>
+            <a:off x="4381446" y="1960880"/>
+            <a:ext cx="1566454" cy="276999"/>
           </a:xfrm>
           <a:prstGeom prst="rect">
             <a:avLst/>
@@ -11258,10 +11407,16 @@
           <a:p>
             <a:pPr algn="ctr"/>
             <a:r>
-              <a:rPr lang="en-US" altLang="zh-CN" sz="1400" dirty="0"/>
+              <a:rPr lang="en-US" altLang="zh-CN" sz="1200" dirty="0">
+                <a:latin typeface="Times New Roman" panose="02020603050405020304" pitchFamily="18" charset="0"/>
+                <a:cs typeface="Times New Roman" panose="02020603050405020304" pitchFamily="18" charset="0"/>
+              </a:rPr>
               <a:t>(b) column-tile format</a:t>
             </a:r>
-            <a:endParaRPr lang="zh-CN" altLang="en-US" sz="1400" dirty="0"/>
+            <a:endParaRPr lang="zh-CN" altLang="en-US" sz="1200" dirty="0">
+              <a:latin typeface="Times New Roman" panose="02020603050405020304" pitchFamily="18" charset="0"/>
+              <a:cs typeface="Times New Roman" panose="02020603050405020304" pitchFamily="18" charset="0"/>
+            </a:endParaRPr>
           </a:p>
         </p:txBody>
       </p:sp>
@@ -11280,13 +11435,13 @@
           <p:nvPr>
             <p:extLst>
               <p:ext uri="{D42A27DB-BD31-4B8C-83A1-F6EECF244321}">
-                <p14:modId xmlns:p14="http://schemas.microsoft.com/office/powerpoint/2010/main" val="2412829540"/>
+                <p14:modId xmlns:p14="http://schemas.microsoft.com/office/powerpoint/2010/main" val="2312326572"/>
               </p:ext>
             </p:extLst>
           </p:nvPr>
         </p:nvGraphicFramePr>
         <p:xfrm>
-          <a:off x="6689089" y="907625"/>
+          <a:off x="2395305" y="2827539"/>
           <a:ext cx="360000" cy="720000"/>
         </p:xfrm>
         <a:graphic>
@@ -11781,7 +11936,7 @@
         </p:nvGrpSpPr>
         <p:grpSpPr>
           <a:xfrm>
-            <a:off x="6711314" y="902793"/>
+            <a:off x="2417530" y="2822707"/>
             <a:ext cx="304800" cy="724108"/>
             <a:chOff x="4959349" y="1734802"/>
             <a:chExt cx="304800" cy="724108"/>
@@ -11817,10 +11972,16 @@
             <a:p>
               <a:pPr algn="ctr"/>
               <a:r>
-                <a:rPr lang="en-US" altLang="zh-CN" sz="1100" dirty="0"/>
+                <a:rPr lang="en-US" altLang="zh-CN" sz="1100" dirty="0">
+                  <a:latin typeface="Times New Roman" panose="02020603050405020304" pitchFamily="18" charset="0"/>
+                  <a:cs typeface="Times New Roman" panose="02020603050405020304" pitchFamily="18" charset="0"/>
+                </a:rPr>
                 <a:t>0</a:t>
               </a:r>
-              <a:endParaRPr lang="zh-CN" altLang="en-US" sz="1100" dirty="0"/>
+              <a:endParaRPr lang="zh-CN" altLang="en-US" sz="1100" dirty="0">
+                <a:latin typeface="Times New Roman" panose="02020603050405020304" pitchFamily="18" charset="0"/>
+                <a:cs typeface="Times New Roman" panose="02020603050405020304" pitchFamily="18" charset="0"/>
+              </a:endParaRPr>
             </a:p>
           </p:txBody>
         </p:sp>
@@ -11854,10 +12015,16 @@
             <a:p>
               <a:pPr algn="ctr"/>
               <a:r>
-                <a:rPr lang="en-US" altLang="zh-CN" sz="1100" dirty="0"/>
+                <a:rPr lang="en-US" altLang="zh-CN" sz="1100" dirty="0">
+                  <a:latin typeface="Times New Roman" panose="02020603050405020304" pitchFamily="18" charset="0"/>
+                  <a:cs typeface="Times New Roman" panose="02020603050405020304" pitchFamily="18" charset="0"/>
+                </a:rPr>
                 <a:t>1</a:t>
               </a:r>
-              <a:endParaRPr lang="zh-CN" altLang="en-US" sz="1100" dirty="0"/>
+              <a:endParaRPr lang="zh-CN" altLang="en-US" sz="1100" dirty="0">
+                <a:latin typeface="Times New Roman" panose="02020603050405020304" pitchFamily="18" charset="0"/>
+                <a:cs typeface="Times New Roman" panose="02020603050405020304" pitchFamily="18" charset="0"/>
+              </a:endParaRPr>
             </a:p>
           </p:txBody>
         </p:sp>
@@ -11891,10 +12058,16 @@
             <a:p>
               <a:pPr algn="ctr"/>
               <a:r>
-                <a:rPr lang="en-US" altLang="zh-CN" sz="1100" dirty="0"/>
+                <a:rPr lang="en-US" altLang="zh-CN" sz="1100" dirty="0">
+                  <a:latin typeface="Times New Roman" panose="02020603050405020304" pitchFamily="18" charset="0"/>
+                  <a:cs typeface="Times New Roman" panose="02020603050405020304" pitchFamily="18" charset="0"/>
+                </a:rPr>
                 <a:t>2</a:t>
               </a:r>
-              <a:endParaRPr lang="zh-CN" altLang="en-US" sz="1100" dirty="0"/>
+              <a:endParaRPr lang="zh-CN" altLang="en-US" sz="1100" dirty="0">
+                <a:latin typeface="Times New Roman" panose="02020603050405020304" pitchFamily="18" charset="0"/>
+                <a:cs typeface="Times New Roman" panose="02020603050405020304" pitchFamily="18" charset="0"/>
+              </a:endParaRPr>
             </a:p>
           </p:txBody>
         </p:sp>
@@ -11928,10 +12101,16 @@
             <a:p>
               <a:pPr algn="ctr"/>
               <a:r>
-                <a:rPr lang="en-US" altLang="zh-CN" sz="1100" dirty="0"/>
+                <a:rPr lang="en-US" altLang="zh-CN" sz="1100" dirty="0">
+                  <a:latin typeface="Times New Roman" panose="02020603050405020304" pitchFamily="18" charset="0"/>
+                  <a:cs typeface="Times New Roman" panose="02020603050405020304" pitchFamily="18" charset="0"/>
+                </a:rPr>
                 <a:t>3</a:t>
               </a:r>
-              <a:endParaRPr lang="zh-CN" altLang="en-US" sz="1100" dirty="0"/>
+              <a:endParaRPr lang="zh-CN" altLang="en-US" sz="1100" dirty="0">
+                <a:latin typeface="Times New Roman" panose="02020603050405020304" pitchFamily="18" charset="0"/>
+                <a:cs typeface="Times New Roman" panose="02020603050405020304" pitchFamily="18" charset="0"/>
+              </a:endParaRPr>
             </a:p>
           </p:txBody>
         </p:sp>
@@ -11965,10 +12144,16 @@
             <a:p>
               <a:pPr algn="ctr"/>
               <a:r>
-                <a:rPr lang="en-US" altLang="zh-CN" sz="1100" dirty="0"/>
+                <a:rPr lang="en-US" altLang="zh-CN" sz="1100" dirty="0">
+                  <a:latin typeface="Times New Roman" panose="02020603050405020304" pitchFamily="18" charset="0"/>
+                  <a:cs typeface="Times New Roman" panose="02020603050405020304" pitchFamily="18" charset="0"/>
+                </a:rPr>
                 <a:t>4</a:t>
               </a:r>
-              <a:endParaRPr lang="zh-CN" altLang="en-US" sz="1100" dirty="0"/>
+              <a:endParaRPr lang="zh-CN" altLang="en-US" sz="1100" dirty="0">
+                <a:latin typeface="Times New Roman" panose="02020603050405020304" pitchFamily="18" charset="0"/>
+                <a:cs typeface="Times New Roman" panose="02020603050405020304" pitchFamily="18" charset="0"/>
+              </a:endParaRPr>
             </a:p>
           </p:txBody>
         </p:sp>
@@ -12002,10 +12187,16 @@
             <a:p>
               <a:pPr algn="ctr"/>
               <a:r>
-                <a:rPr lang="en-US" altLang="zh-CN" sz="1100" dirty="0"/>
+                <a:rPr lang="en-US" altLang="zh-CN" sz="1100" dirty="0">
+                  <a:latin typeface="Times New Roman" panose="02020603050405020304" pitchFamily="18" charset="0"/>
+                  <a:cs typeface="Times New Roman" panose="02020603050405020304" pitchFamily="18" charset="0"/>
+                </a:rPr>
                 <a:t>5</a:t>
               </a:r>
-              <a:endParaRPr lang="zh-CN" altLang="en-US" sz="1100" dirty="0"/>
+              <a:endParaRPr lang="zh-CN" altLang="en-US" sz="1100" dirty="0">
+                <a:latin typeface="Times New Roman" panose="02020603050405020304" pitchFamily="18" charset="0"/>
+                <a:cs typeface="Times New Roman" panose="02020603050405020304" pitchFamily="18" charset="0"/>
+              </a:endParaRPr>
             </a:p>
           </p:txBody>
         </p:sp>
@@ -12039,10 +12230,16 @@
             <a:p>
               <a:pPr algn="ctr"/>
               <a:r>
-                <a:rPr lang="en-US" altLang="zh-CN" sz="1100" dirty="0"/>
+                <a:rPr lang="en-US" altLang="zh-CN" sz="1100" dirty="0">
+                  <a:latin typeface="Times New Roman" panose="02020603050405020304" pitchFamily="18" charset="0"/>
+                  <a:cs typeface="Times New Roman" panose="02020603050405020304" pitchFamily="18" charset="0"/>
+                </a:rPr>
                 <a:t>6</a:t>
               </a:r>
-              <a:endParaRPr lang="zh-CN" altLang="en-US" sz="1100" dirty="0"/>
+              <a:endParaRPr lang="zh-CN" altLang="en-US" sz="1100" dirty="0">
+                <a:latin typeface="Times New Roman" panose="02020603050405020304" pitchFamily="18" charset="0"/>
+                <a:cs typeface="Times New Roman" panose="02020603050405020304" pitchFamily="18" charset="0"/>
+              </a:endParaRPr>
             </a:p>
           </p:txBody>
         </p:sp>
@@ -12076,10 +12273,16 @@
             <a:p>
               <a:pPr algn="ctr"/>
               <a:r>
-                <a:rPr lang="en-US" altLang="zh-CN" sz="1100" dirty="0"/>
+                <a:rPr lang="en-US" altLang="zh-CN" sz="1100" dirty="0">
+                  <a:latin typeface="Times New Roman" panose="02020603050405020304" pitchFamily="18" charset="0"/>
+                  <a:cs typeface="Times New Roman" panose="02020603050405020304" pitchFamily="18" charset="0"/>
+                </a:rPr>
                 <a:t>7</a:t>
               </a:r>
-              <a:endParaRPr lang="zh-CN" altLang="en-US" sz="1100" dirty="0"/>
+              <a:endParaRPr lang="zh-CN" altLang="en-US" sz="1100" dirty="0">
+                <a:latin typeface="Times New Roman" panose="02020603050405020304" pitchFamily="18" charset="0"/>
+                <a:cs typeface="Times New Roman" panose="02020603050405020304" pitchFamily="18" charset="0"/>
+              </a:endParaRPr>
             </a:p>
           </p:txBody>
         </p:sp>
@@ -12099,13 +12302,13 @@
           <p:nvPr>
             <p:extLst>
               <p:ext uri="{D42A27DB-BD31-4B8C-83A1-F6EECF244321}">
-                <p14:modId xmlns:p14="http://schemas.microsoft.com/office/powerpoint/2010/main" val="2449839540"/>
+                <p14:modId xmlns:p14="http://schemas.microsoft.com/office/powerpoint/2010/main" val="2405210607"/>
               </p:ext>
             </p:extLst>
           </p:nvPr>
         </p:nvGraphicFramePr>
         <p:xfrm>
-          <a:off x="7252652" y="391687"/>
+          <a:off x="2958868" y="2311601"/>
           <a:ext cx="720000" cy="360000"/>
         </p:xfrm>
         <a:graphic>
@@ -12600,7 +12803,7 @@
         </p:nvGrpSpPr>
         <p:grpSpPr>
           <a:xfrm rot="16200000">
-            <a:off x="7431540" y="232574"/>
+            <a:off x="3137756" y="2152488"/>
             <a:ext cx="350253" cy="678656"/>
             <a:chOff x="4087311" y="2378241"/>
             <a:chExt cx="350253" cy="678656"/>
@@ -12636,10 +12839,16 @@
             <a:p>
               <a:pPr algn="ctr"/>
               <a:r>
-                <a:rPr lang="en-US" altLang="zh-CN" sz="1100" dirty="0"/>
+                <a:rPr lang="en-US" altLang="zh-CN" sz="1100" dirty="0">
+                  <a:latin typeface="Times New Roman" panose="02020603050405020304" pitchFamily="18" charset="0"/>
+                  <a:cs typeface="Times New Roman" panose="02020603050405020304" pitchFamily="18" charset="0"/>
+                </a:rPr>
                 <a:t>1</a:t>
               </a:r>
-              <a:endParaRPr lang="zh-CN" altLang="en-US" sz="1100" dirty="0"/>
+              <a:endParaRPr lang="zh-CN" altLang="en-US" sz="1100" dirty="0">
+                <a:latin typeface="Times New Roman" panose="02020603050405020304" pitchFamily="18" charset="0"/>
+                <a:cs typeface="Times New Roman" panose="02020603050405020304" pitchFamily="18" charset="0"/>
+              </a:endParaRPr>
             </a:p>
           </p:txBody>
         </p:sp>
@@ -12673,10 +12882,16 @@
             <a:p>
               <a:pPr algn="ctr"/>
               <a:r>
-                <a:rPr lang="en-US" altLang="zh-CN" sz="1100" dirty="0"/>
+                <a:rPr lang="en-US" altLang="zh-CN" sz="1100" dirty="0">
+                  <a:latin typeface="Times New Roman" panose="02020603050405020304" pitchFamily="18" charset="0"/>
+                  <a:cs typeface="Times New Roman" panose="02020603050405020304" pitchFamily="18" charset="0"/>
+                </a:rPr>
                 <a:t>0</a:t>
               </a:r>
-              <a:endParaRPr lang="zh-CN" altLang="en-US" sz="1100" dirty="0"/>
+              <a:endParaRPr lang="zh-CN" altLang="en-US" sz="1100" dirty="0">
+                <a:latin typeface="Times New Roman" panose="02020603050405020304" pitchFamily="18" charset="0"/>
+                <a:cs typeface="Times New Roman" panose="02020603050405020304" pitchFamily="18" charset="0"/>
+              </a:endParaRPr>
             </a:p>
           </p:txBody>
         </p:sp>
@@ -12710,10 +12925,16 @@
             <a:p>
               <a:pPr algn="ctr"/>
               <a:r>
-                <a:rPr lang="en-US" altLang="zh-CN" sz="1100" dirty="0"/>
+                <a:rPr lang="en-US" altLang="zh-CN" sz="1100" dirty="0">
+                  <a:latin typeface="Times New Roman" panose="02020603050405020304" pitchFamily="18" charset="0"/>
+                  <a:cs typeface="Times New Roman" panose="02020603050405020304" pitchFamily="18" charset="0"/>
+                </a:rPr>
                 <a:t>3</a:t>
               </a:r>
-              <a:endParaRPr lang="zh-CN" altLang="en-US" sz="1100" dirty="0"/>
+              <a:endParaRPr lang="zh-CN" altLang="en-US" sz="1100" dirty="0">
+                <a:latin typeface="Times New Roman" panose="02020603050405020304" pitchFamily="18" charset="0"/>
+                <a:cs typeface="Times New Roman" panose="02020603050405020304" pitchFamily="18" charset="0"/>
+              </a:endParaRPr>
             </a:p>
           </p:txBody>
         </p:sp>
@@ -12747,10 +12968,16 @@
             <a:p>
               <a:pPr algn="ctr"/>
               <a:r>
-                <a:rPr lang="en-US" altLang="zh-CN" sz="1100" dirty="0"/>
+                <a:rPr lang="en-US" altLang="zh-CN" sz="1100" dirty="0">
+                  <a:latin typeface="Times New Roman" panose="02020603050405020304" pitchFamily="18" charset="0"/>
+                  <a:cs typeface="Times New Roman" panose="02020603050405020304" pitchFamily="18" charset="0"/>
+                </a:rPr>
                 <a:t>2</a:t>
               </a:r>
-              <a:endParaRPr lang="zh-CN" altLang="en-US" sz="1100" dirty="0"/>
+              <a:endParaRPr lang="zh-CN" altLang="en-US" sz="1100" dirty="0">
+                <a:latin typeface="Times New Roman" panose="02020603050405020304" pitchFamily="18" charset="0"/>
+                <a:cs typeface="Times New Roman" panose="02020603050405020304" pitchFamily="18" charset="0"/>
+              </a:endParaRPr>
             </a:p>
           </p:txBody>
         </p:sp>
@@ -12784,10 +13011,16 @@
             <a:p>
               <a:pPr algn="ctr"/>
               <a:r>
-                <a:rPr lang="en-US" altLang="zh-CN" sz="1100" dirty="0"/>
+                <a:rPr lang="en-US" altLang="zh-CN" sz="1100" dirty="0">
+                  <a:latin typeface="Times New Roman" panose="02020603050405020304" pitchFamily="18" charset="0"/>
+                  <a:cs typeface="Times New Roman" panose="02020603050405020304" pitchFamily="18" charset="0"/>
+                </a:rPr>
                 <a:t>5</a:t>
               </a:r>
-              <a:endParaRPr lang="zh-CN" altLang="en-US" sz="1100" dirty="0"/>
+              <a:endParaRPr lang="zh-CN" altLang="en-US" sz="1100" dirty="0">
+                <a:latin typeface="Times New Roman" panose="02020603050405020304" pitchFamily="18" charset="0"/>
+                <a:cs typeface="Times New Roman" panose="02020603050405020304" pitchFamily="18" charset="0"/>
+              </a:endParaRPr>
             </a:p>
           </p:txBody>
         </p:sp>
@@ -12821,10 +13054,16 @@
             <a:p>
               <a:pPr algn="ctr"/>
               <a:r>
-                <a:rPr lang="en-US" altLang="zh-CN" sz="1100" dirty="0"/>
+                <a:rPr lang="en-US" altLang="zh-CN" sz="1100" dirty="0">
+                  <a:latin typeface="Times New Roman" panose="02020603050405020304" pitchFamily="18" charset="0"/>
+                  <a:cs typeface="Times New Roman" panose="02020603050405020304" pitchFamily="18" charset="0"/>
+                </a:rPr>
                 <a:t>4</a:t>
               </a:r>
-              <a:endParaRPr lang="zh-CN" altLang="en-US" sz="1100" dirty="0"/>
+              <a:endParaRPr lang="zh-CN" altLang="en-US" sz="1100" dirty="0">
+                <a:latin typeface="Times New Roman" panose="02020603050405020304" pitchFamily="18" charset="0"/>
+                <a:cs typeface="Times New Roman" panose="02020603050405020304" pitchFamily="18" charset="0"/>
+              </a:endParaRPr>
             </a:p>
           </p:txBody>
         </p:sp>
@@ -12858,10 +13097,16 @@
             <a:p>
               <a:pPr algn="ctr"/>
               <a:r>
-                <a:rPr lang="en-US" altLang="zh-CN" sz="1100" dirty="0"/>
+                <a:rPr lang="en-US" altLang="zh-CN" sz="1100" dirty="0">
+                  <a:latin typeface="Times New Roman" panose="02020603050405020304" pitchFamily="18" charset="0"/>
+                  <a:cs typeface="Times New Roman" panose="02020603050405020304" pitchFamily="18" charset="0"/>
+                </a:rPr>
                 <a:t>7</a:t>
               </a:r>
-              <a:endParaRPr lang="zh-CN" altLang="en-US" sz="1100" dirty="0"/>
+              <a:endParaRPr lang="zh-CN" altLang="en-US" sz="1100" dirty="0">
+                <a:latin typeface="Times New Roman" panose="02020603050405020304" pitchFamily="18" charset="0"/>
+                <a:cs typeface="Times New Roman" panose="02020603050405020304" pitchFamily="18" charset="0"/>
+              </a:endParaRPr>
             </a:p>
           </p:txBody>
         </p:sp>
@@ -12895,10 +13140,16 @@
             <a:p>
               <a:pPr algn="ctr"/>
               <a:r>
-                <a:rPr lang="en-US" altLang="zh-CN" sz="1100" dirty="0"/>
+                <a:rPr lang="en-US" altLang="zh-CN" sz="1100" dirty="0">
+                  <a:latin typeface="Times New Roman" panose="02020603050405020304" pitchFamily="18" charset="0"/>
+                  <a:cs typeface="Times New Roman" panose="02020603050405020304" pitchFamily="18" charset="0"/>
+                </a:rPr>
                 <a:t>6</a:t>
               </a:r>
-              <a:endParaRPr lang="zh-CN" altLang="en-US" sz="1100" dirty="0"/>
+              <a:endParaRPr lang="zh-CN" altLang="en-US" sz="1100" dirty="0">
+                <a:latin typeface="Times New Roman" panose="02020603050405020304" pitchFamily="18" charset="0"/>
+                <a:cs typeface="Times New Roman" panose="02020603050405020304" pitchFamily="18" charset="0"/>
+              </a:endParaRPr>
             </a:p>
           </p:txBody>
         </p:sp>
@@ -12918,13 +13169,13 @@
           <p:nvPr>
             <p:extLst>
               <p:ext uri="{D42A27DB-BD31-4B8C-83A1-F6EECF244321}">
-                <p14:modId xmlns:p14="http://schemas.microsoft.com/office/powerpoint/2010/main" val="3520415069"/>
+                <p14:modId xmlns:p14="http://schemas.microsoft.com/office/powerpoint/2010/main" val="2419913572"/>
               </p:ext>
             </p:extLst>
           </p:nvPr>
         </p:nvGraphicFramePr>
         <p:xfrm>
-          <a:off x="7256621" y="906037"/>
+          <a:off x="2962837" y="2825951"/>
           <a:ext cx="720000" cy="720000"/>
         </p:xfrm>
         <a:graphic>
@@ -13777,7 +14028,7 @@
         </p:nvSpPr>
         <p:spPr>
           <a:xfrm>
-            <a:off x="7254240" y="905510"/>
+            <a:off x="2960456" y="2825424"/>
             <a:ext cx="720000" cy="180000"/>
           </a:xfrm>
           <a:prstGeom prst="rect">
@@ -13815,7 +14066,10 @@
           <a:lstStyle/>
           <a:p>
             <a:pPr algn="ctr"/>
-            <a:endParaRPr lang="zh-CN" altLang="en-US"/>
+            <a:endParaRPr lang="zh-CN" altLang="en-US">
+              <a:latin typeface="Times New Roman" panose="02020603050405020304" pitchFamily="18" charset="0"/>
+              <a:cs typeface="Times New Roman" panose="02020603050405020304" pitchFamily="18" charset="0"/>
+            </a:endParaRPr>
           </a:p>
         </p:txBody>
       </p:sp>
@@ -13833,7 +14087,7 @@
         </p:nvSpPr>
         <p:spPr>
           <a:xfrm>
-            <a:off x="7254240" y="1083310"/>
+            <a:off x="2960456" y="3003224"/>
             <a:ext cx="720000" cy="180000"/>
           </a:xfrm>
           <a:prstGeom prst="rect">
@@ -13871,7 +14125,10 @@
           <a:lstStyle/>
           <a:p>
             <a:pPr algn="ctr"/>
-            <a:endParaRPr lang="zh-CN" altLang="en-US"/>
+            <a:endParaRPr lang="zh-CN" altLang="en-US">
+              <a:latin typeface="Times New Roman" panose="02020603050405020304" pitchFamily="18" charset="0"/>
+              <a:cs typeface="Times New Roman" panose="02020603050405020304" pitchFamily="18" charset="0"/>
+            </a:endParaRPr>
           </a:p>
         </p:txBody>
       </p:sp>
@@ -13889,7 +14146,7 @@
         </p:nvSpPr>
         <p:spPr>
           <a:xfrm>
-            <a:off x="7255033" y="911860"/>
+            <a:off x="2961249" y="2831774"/>
             <a:ext cx="180000" cy="720000"/>
           </a:xfrm>
           <a:prstGeom prst="rect">
@@ -13924,7 +14181,10 @@
           <a:lstStyle/>
           <a:p>
             <a:pPr algn="ctr"/>
-            <a:endParaRPr lang="zh-CN" altLang="en-US"/>
+            <a:endParaRPr lang="zh-CN" altLang="en-US">
+              <a:latin typeface="Times New Roman" panose="02020603050405020304" pitchFamily="18" charset="0"/>
+              <a:cs typeface="Times New Roman" panose="02020603050405020304" pitchFamily="18" charset="0"/>
+            </a:endParaRPr>
           </a:p>
         </p:txBody>
       </p:sp>
@@ -13942,7 +14202,7 @@
         </p:nvSpPr>
         <p:spPr>
           <a:xfrm>
-            <a:off x="7436009" y="907097"/>
+            <a:off x="3142225" y="2827011"/>
             <a:ext cx="180000" cy="720000"/>
           </a:xfrm>
           <a:prstGeom prst="rect">
@@ -13977,7 +14237,10 @@
           <a:lstStyle/>
           <a:p>
             <a:pPr algn="ctr"/>
-            <a:endParaRPr lang="zh-CN" altLang="en-US"/>
+            <a:endParaRPr lang="zh-CN" altLang="en-US">
+              <a:latin typeface="Times New Roman" panose="02020603050405020304" pitchFamily="18" charset="0"/>
+              <a:cs typeface="Times New Roman" panose="02020603050405020304" pitchFamily="18" charset="0"/>
+            </a:endParaRPr>
           </a:p>
         </p:txBody>
       </p:sp>
@@ -13995,8 +14258,8 @@
         </p:nvSpPr>
         <p:spPr>
           <a:xfrm rot="16200000">
-            <a:off x="7151871" y="1755283"/>
-            <a:ext cx="383381" cy="169277"/>
+            <a:off x="2798676" y="3734608"/>
+            <a:ext cx="502204" cy="169277"/>
           </a:xfrm>
           <a:prstGeom prst="rect">
             <a:avLst/>
@@ -14011,10 +14274,16 @@
           <a:p>
             <a:pPr algn="ctr"/>
             <a:r>
-              <a:rPr lang="en-US" altLang="zh-CN" sz="1100" dirty="0"/>
-              <a:t>t0.v0</a:t>
+              <a:rPr lang="en-US" altLang="zh-CN" sz="1100" dirty="0">
+                <a:latin typeface="Times New Roman" panose="02020603050405020304" pitchFamily="18" charset="0"/>
+                <a:cs typeface="Times New Roman" panose="02020603050405020304" pitchFamily="18" charset="0"/>
+              </a:rPr>
+              <a:t>a0v.s[0]</a:t>
             </a:r>
-            <a:endParaRPr lang="zh-CN" altLang="en-US" sz="1100" dirty="0"/>
+            <a:endParaRPr lang="zh-CN" altLang="en-US" sz="1100" dirty="0">
+              <a:latin typeface="Times New Roman" panose="02020603050405020304" pitchFamily="18" charset="0"/>
+              <a:cs typeface="Times New Roman" panose="02020603050405020304" pitchFamily="18" charset="0"/>
+            </a:endParaRPr>
           </a:p>
         </p:txBody>
       </p:sp>
@@ -14032,8 +14301,8 @@
         </p:nvSpPr>
         <p:spPr>
           <a:xfrm rot="16200000">
-            <a:off x="7332846" y="1752902"/>
-            <a:ext cx="383381" cy="169277"/>
+            <a:off x="2979650" y="3732228"/>
+            <a:ext cx="502205" cy="169277"/>
           </a:xfrm>
           <a:prstGeom prst="rect">
             <a:avLst/>
@@ -14048,10 +14317,16 @@
           <a:p>
             <a:pPr algn="ctr"/>
             <a:r>
-              <a:rPr lang="en-US" altLang="zh-CN" sz="1100" dirty="0"/>
-              <a:t>t0.v1</a:t>
+              <a:rPr lang="en-US" altLang="zh-CN" sz="1100" dirty="0">
+                <a:latin typeface="Times New Roman" panose="02020603050405020304" pitchFamily="18" charset="0"/>
+                <a:cs typeface="Times New Roman" panose="02020603050405020304" pitchFamily="18" charset="0"/>
+              </a:rPr>
+              <a:t>a0v.s[1]</a:t>
             </a:r>
-            <a:endParaRPr lang="zh-CN" altLang="en-US" sz="1100" dirty="0"/>
+            <a:endParaRPr lang="zh-CN" altLang="en-US" sz="1100" dirty="0">
+              <a:latin typeface="Times New Roman" panose="02020603050405020304" pitchFamily="18" charset="0"/>
+              <a:cs typeface="Times New Roman" panose="02020603050405020304" pitchFamily="18" charset="0"/>
+            </a:endParaRPr>
           </a:p>
         </p:txBody>
       </p:sp>
@@ -14069,8 +14344,8 @@
         </p:nvSpPr>
         <p:spPr>
           <a:xfrm rot="5400000">
-            <a:off x="8078991" y="612558"/>
-            <a:ext cx="169277" cy="742950"/>
+            <a:off x="3848676" y="2655386"/>
+            <a:ext cx="169277" cy="497124"/>
           </a:xfrm>
           <a:prstGeom prst="rect">
             <a:avLst/>
@@ -14085,10 +14360,16 @@
           <a:p>
             <a:pPr algn="ctr"/>
             <a:r>
-              <a:rPr lang="en-US" altLang="zh-CN" sz="1100" dirty="0"/>
-              <a:t>t0.h0</a:t>
+              <a:rPr lang="en-US" altLang="zh-CN" sz="1100" dirty="0">
+                <a:latin typeface="Times New Roman" panose="02020603050405020304" pitchFamily="18" charset="0"/>
+                <a:cs typeface="Times New Roman" panose="02020603050405020304" pitchFamily="18" charset="0"/>
+              </a:rPr>
+              <a:t>a0h.s[0]</a:t>
             </a:r>
-            <a:endParaRPr lang="zh-CN" altLang="en-US" sz="1100" dirty="0"/>
+            <a:endParaRPr lang="zh-CN" altLang="en-US" sz="1100" dirty="0">
+              <a:latin typeface="Times New Roman" panose="02020603050405020304" pitchFamily="18" charset="0"/>
+              <a:cs typeface="Times New Roman" panose="02020603050405020304" pitchFamily="18" charset="0"/>
+            </a:endParaRPr>
           </a:p>
         </p:txBody>
       </p:sp>
@@ -14106,8 +14387,8 @@
         </p:nvSpPr>
         <p:spPr>
           <a:xfrm rot="5400000">
-            <a:off x="8082167" y="795121"/>
-            <a:ext cx="169277" cy="742950"/>
+            <a:off x="3851852" y="2837949"/>
+            <a:ext cx="169277" cy="497124"/>
           </a:xfrm>
           <a:prstGeom prst="rect">
             <a:avLst/>
@@ -14122,10 +14403,16 @@
           <a:p>
             <a:pPr algn="ctr"/>
             <a:r>
-              <a:rPr lang="en-US" altLang="zh-CN" sz="1100" dirty="0"/>
-              <a:t>t0.h1</a:t>
+              <a:rPr lang="en-US" altLang="zh-CN" sz="1100" dirty="0">
+                <a:latin typeface="Times New Roman" panose="02020603050405020304" pitchFamily="18" charset="0"/>
+                <a:cs typeface="Times New Roman" panose="02020603050405020304" pitchFamily="18" charset="0"/>
+              </a:rPr>
+              <a:t>a0h.s[1]</a:t>
             </a:r>
-            <a:endParaRPr lang="zh-CN" altLang="en-US" sz="1100" dirty="0"/>
+            <a:endParaRPr lang="zh-CN" altLang="en-US" sz="1100" dirty="0">
+              <a:latin typeface="Times New Roman" panose="02020603050405020304" pitchFamily="18" charset="0"/>
+              <a:cs typeface="Times New Roman" panose="02020603050405020304" pitchFamily="18" charset="0"/>
+            </a:endParaRPr>
           </a:p>
         </p:txBody>
       </p:sp>
@@ -14143,7 +14430,7 @@
         </p:nvSpPr>
         <p:spPr>
           <a:xfrm>
-            <a:off x="8383588" y="947738"/>
+            <a:off x="4197754" y="2867652"/>
             <a:ext cx="104775" cy="295275"/>
           </a:xfrm>
           <a:prstGeom prst="rightBrace">
@@ -14169,7 +14456,10 @@
           <a:lstStyle/>
           <a:p>
             <a:pPr algn="ctr"/>
-            <a:endParaRPr lang="zh-CN" altLang="en-US"/>
+            <a:endParaRPr lang="zh-CN" altLang="en-US">
+              <a:latin typeface="Times New Roman" panose="02020603050405020304" pitchFamily="18" charset="0"/>
+              <a:cs typeface="Times New Roman" panose="02020603050405020304" pitchFamily="18" charset="0"/>
+            </a:endParaRPr>
           </a:p>
         </p:txBody>
       </p:sp>
@@ -14187,7 +14477,7 @@
         </p:nvSpPr>
         <p:spPr>
           <a:xfrm>
-            <a:off x="8588376" y="1009650"/>
+            <a:off x="4358092" y="2929564"/>
             <a:ext cx="319087" cy="176212"/>
           </a:xfrm>
           <a:prstGeom prst="rightArrow">
@@ -14215,7 +14505,10 @@
           <a:lstStyle/>
           <a:p>
             <a:pPr algn="ctr"/>
-            <a:endParaRPr lang="zh-CN" altLang="en-US"/>
+            <a:endParaRPr lang="zh-CN" altLang="en-US">
+              <a:latin typeface="Times New Roman" panose="02020603050405020304" pitchFamily="18" charset="0"/>
+              <a:cs typeface="Times New Roman" panose="02020603050405020304" pitchFamily="18" charset="0"/>
+            </a:endParaRPr>
           </a:p>
         </p:txBody>
       </p:sp>
@@ -14233,7 +14526,7 @@
         </p:nvSpPr>
         <p:spPr>
           <a:xfrm rot="5400000">
-            <a:off x="8631089" y="720157"/>
+            <a:off x="4407155" y="2640071"/>
             <a:ext cx="169277" cy="416631"/>
           </a:xfrm>
           <a:prstGeom prst="rect">
@@ -14249,10 +14542,16 @@
           <a:p>
             <a:pPr algn="ctr"/>
             <a:r>
-              <a:rPr lang="en-US" altLang="zh-CN" sz="1100" dirty="0"/>
+              <a:rPr lang="en-US" altLang="zh-CN" sz="1100" dirty="0">
+                <a:latin typeface="Times New Roman" panose="02020603050405020304" pitchFamily="18" charset="0"/>
+                <a:cs typeface="Times New Roman" panose="02020603050405020304" pitchFamily="18" charset="0"/>
+              </a:rPr>
               <a:t>st2</a:t>
             </a:r>
-            <a:endParaRPr lang="zh-CN" altLang="en-US" sz="1100" dirty="0"/>
+            <a:endParaRPr lang="zh-CN" altLang="en-US" sz="1100" dirty="0">
+              <a:latin typeface="Times New Roman" panose="02020603050405020304" pitchFamily="18" charset="0"/>
+              <a:cs typeface="Times New Roman" panose="02020603050405020304" pitchFamily="18" charset="0"/>
+            </a:endParaRPr>
           </a:p>
         </p:txBody>
       </p:sp>
@@ -14271,13 +14570,13 @@
           <p:nvPr>
             <p:extLst>
               <p:ext uri="{D42A27DB-BD31-4B8C-83A1-F6EECF244321}">
-                <p14:modId xmlns:p14="http://schemas.microsoft.com/office/powerpoint/2010/main" val="874315254"/>
+                <p14:modId xmlns:p14="http://schemas.microsoft.com/office/powerpoint/2010/main" val="739836707"/>
               </p:ext>
             </p:extLst>
           </p:nvPr>
         </p:nvGraphicFramePr>
         <p:xfrm>
-          <a:off x="8986202" y="906037"/>
+          <a:off x="4749568" y="2825951"/>
           <a:ext cx="720000" cy="360000"/>
         </p:xfrm>
         <a:graphic>
@@ -14373,7 +14672,7 @@
         </p:nvSpPr>
         <p:spPr>
           <a:xfrm rot="5400000">
-            <a:off x="9167517" y="712569"/>
+            <a:off x="4937233" y="2632483"/>
             <a:ext cx="338554" cy="742950"/>
           </a:xfrm>
           <a:prstGeom prst="rect">
@@ -14389,17 +14688,26 @@
           <a:p>
             <a:pPr algn="ctr"/>
             <a:r>
-              <a:rPr lang="en-US" altLang="zh-CN" sz="1100" dirty="0"/>
+              <a:rPr lang="en-US" altLang="zh-CN" sz="1100" dirty="0">
+                <a:latin typeface="Times New Roman" panose="02020603050405020304" pitchFamily="18" charset="0"/>
+                <a:cs typeface="Times New Roman" panose="02020603050405020304" pitchFamily="18" charset="0"/>
+              </a:rPr>
               <a:t>column</a:t>
             </a:r>
           </a:p>
           <a:p>
             <a:pPr algn="ctr"/>
             <a:r>
-              <a:rPr lang="en-US" altLang="zh-CN" sz="1100" dirty="0"/>
+              <a:rPr lang="en-US" altLang="zh-CN" sz="1100" dirty="0">
+                <a:latin typeface="Times New Roman" panose="02020603050405020304" pitchFamily="18" charset="0"/>
+                <a:cs typeface="Times New Roman" panose="02020603050405020304" pitchFamily="18" charset="0"/>
+              </a:rPr>
               <a:t>tile</a:t>
             </a:r>
-            <a:endParaRPr lang="zh-CN" altLang="en-US" sz="1100" dirty="0"/>
+            <a:endParaRPr lang="zh-CN" altLang="en-US" sz="1100" dirty="0">
+              <a:latin typeface="Times New Roman" panose="02020603050405020304" pitchFamily="18" charset="0"/>
+              <a:cs typeface="Times New Roman" panose="02020603050405020304" pitchFamily="18" charset="0"/>
+            </a:endParaRPr>
           </a:p>
         </p:txBody>
       </p:sp>
@@ -14417,8 +14725,8 @@
         </p:nvSpPr>
         <p:spPr>
           <a:xfrm>
-            <a:off x="6287683" y="1967230"/>
-            <a:ext cx="3773790" cy="307777"/>
+            <a:off x="2356979" y="4020494"/>
+            <a:ext cx="3047629" cy="276999"/>
           </a:xfrm>
           <a:prstGeom prst="rect">
             <a:avLst/>
@@ -14433,10 +14741,311 @@
           <a:p>
             <a:pPr algn="ctr"/>
             <a:r>
-              <a:rPr lang="en-US" altLang="zh-CN" sz="1400" dirty="0"/>
+              <a:rPr lang="en-US" altLang="zh-CN" sz="1200" dirty="0">
+                <a:latin typeface="Times New Roman" panose="02020603050405020304" pitchFamily="18" charset="0"/>
+                <a:cs typeface="Times New Roman" panose="02020603050405020304" pitchFamily="18" charset="0"/>
+              </a:rPr>
               <a:t>(c) read result from array and store to memory</a:t>
             </a:r>
-            <a:endParaRPr lang="zh-CN" altLang="en-US" sz="1400" dirty="0"/>
+            <a:endParaRPr lang="zh-CN" altLang="en-US" sz="1200" dirty="0">
+              <a:latin typeface="Times New Roman" panose="02020603050405020304" pitchFamily="18" charset="0"/>
+              <a:cs typeface="Times New Roman" panose="02020603050405020304" pitchFamily="18" charset="0"/>
+            </a:endParaRPr>
+          </a:p>
+        </p:txBody>
+      </p:sp>
+      <p:sp>
+        <p:nvSpPr>
+          <p:cNvPr id="2" name="右大括号 1">
+            <a:extLst>
+              <a:ext uri="{FF2B5EF4-FFF2-40B4-BE49-F238E27FC236}">
+                <a16:creationId xmlns:a16="http://schemas.microsoft.com/office/drawing/2014/main" id="{2C567459-8D3E-AD07-3F30-99CE7A38A149}"/>
+              </a:ext>
+            </a:extLst>
+          </p:cNvPr>
+          <p:cNvSpPr/>
+          <p:nvPr/>
+        </p:nvSpPr>
+        <p:spPr>
+          <a:xfrm>
+            <a:off x="3435922" y="3601858"/>
+            <a:ext cx="104775" cy="295275"/>
+          </a:xfrm>
+          <a:prstGeom prst="rightBrace">
+            <a:avLst/>
+          </a:prstGeom>
+        </p:spPr>
+        <p:style>
+          <a:lnRef idx="2">
+            <a:schemeClr val="accent1"/>
+          </a:lnRef>
+          <a:fillRef idx="0">
+            <a:schemeClr val="accent1"/>
+          </a:fillRef>
+          <a:effectRef idx="1">
+            <a:schemeClr val="accent1"/>
+          </a:effectRef>
+          <a:fontRef idx="minor">
+            <a:schemeClr val="tx1"/>
+          </a:fontRef>
+        </p:style>
+        <p:txBody>
+          <a:bodyPr rtlCol="0" anchor="ctr"/>
+          <a:lstStyle/>
+          <a:p>
+            <a:pPr algn="ctr"/>
+            <a:endParaRPr lang="zh-CN" altLang="en-US">
+              <a:latin typeface="Times New Roman" panose="02020603050405020304" pitchFamily="18" charset="0"/>
+              <a:cs typeface="Times New Roman" panose="02020603050405020304" pitchFamily="18" charset="0"/>
+            </a:endParaRPr>
+          </a:p>
+        </p:txBody>
+      </p:sp>
+      <p:sp>
+        <p:nvSpPr>
+          <p:cNvPr id="3" name="箭头: 右 2">
+            <a:extLst>
+              <a:ext uri="{FF2B5EF4-FFF2-40B4-BE49-F238E27FC236}">
+                <a16:creationId xmlns:a16="http://schemas.microsoft.com/office/drawing/2014/main" id="{478DD401-47A6-9775-5B79-849A96EB550D}"/>
+              </a:ext>
+            </a:extLst>
+          </p:cNvPr>
+          <p:cNvSpPr/>
+          <p:nvPr/>
+        </p:nvSpPr>
+        <p:spPr>
+          <a:xfrm>
+            <a:off x="3657138" y="3662505"/>
+            <a:ext cx="319087" cy="176212"/>
+          </a:xfrm>
+          <a:prstGeom prst="rightArrow">
+            <a:avLst/>
+          </a:prstGeom>
+        </p:spPr>
+        <p:style>
+          <a:lnRef idx="2">
+            <a:schemeClr val="accent1">
+              <a:shade val="15000"/>
+            </a:schemeClr>
+          </a:lnRef>
+          <a:fillRef idx="1">
+            <a:schemeClr val="accent1"/>
+          </a:fillRef>
+          <a:effectRef idx="0">
+            <a:schemeClr val="accent1"/>
+          </a:effectRef>
+          <a:fontRef idx="minor">
+            <a:schemeClr val="lt1"/>
+          </a:fontRef>
+        </p:style>
+        <p:txBody>
+          <a:bodyPr rtlCol="0" anchor="ctr"/>
+          <a:lstStyle/>
+          <a:p>
+            <a:pPr algn="ctr"/>
+            <a:endParaRPr lang="zh-CN" altLang="en-US">
+              <a:latin typeface="Times New Roman" panose="02020603050405020304" pitchFamily="18" charset="0"/>
+              <a:cs typeface="Times New Roman" panose="02020603050405020304" pitchFamily="18" charset="0"/>
+            </a:endParaRPr>
+          </a:p>
+        </p:txBody>
+      </p:sp>
+      <p:graphicFrame>
+        <p:nvGraphicFramePr>
+          <p:cNvPr id="7" name="表格 6">
+            <a:extLst>
+              <a:ext uri="{FF2B5EF4-FFF2-40B4-BE49-F238E27FC236}">
+                <a16:creationId xmlns:a16="http://schemas.microsoft.com/office/drawing/2014/main" id="{0EFD15B0-5335-298D-DFD0-CF15CD3AD262}"/>
+              </a:ext>
+            </a:extLst>
+          </p:cNvPr>
+          <p:cNvGraphicFramePr>
+            <a:graphicFrameLocks noGrp="1"/>
+          </p:cNvGraphicFramePr>
+          <p:nvPr>
+            <p:extLst>
+              <p:ext uri="{D42A27DB-BD31-4B8C-83A1-F6EECF244321}">
+                <p14:modId xmlns:p14="http://schemas.microsoft.com/office/powerpoint/2010/main" val="3049027385"/>
+              </p:ext>
+            </p:extLst>
+          </p:nvPr>
+        </p:nvGraphicFramePr>
+        <p:xfrm>
+          <a:off x="4054964" y="3558892"/>
+          <a:ext cx="720000" cy="360000"/>
+        </p:xfrm>
+        <a:graphic>
+          <a:graphicData uri="http://schemas.openxmlformats.org/drawingml/2006/table">
+            <a:tbl>
+              <a:tblPr firstRow="1" bandRow="1">
+                <a:tableStyleId>{5C22544A-7EE6-4342-B048-85BDC9FD1C3A}</a:tableStyleId>
+              </a:tblPr>
+              <a:tblGrid>
+                <a:gridCol w="720000">
+                  <a:extLst>
+                    <a:ext uri="{9D8B030D-6E8A-4147-A177-3AD203B41FA5}">
+                      <a16:colId xmlns:a16="http://schemas.microsoft.com/office/drawing/2014/main" val="757230694"/>
+                    </a:ext>
+                  </a:extLst>
+                </a:gridCol>
+              </a:tblGrid>
+              <a:tr h="360000">
+                <a:tc>
+                  <a:txBody>
+                    <a:bodyPr/>
+                    <a:lstStyle/>
+                    <a:p>
+                      <a:endParaRPr lang="zh-CN" altLang="en-US" sz="100" dirty="0"/>
+                    </a:p>
+                  </a:txBody>
+                  <a:tcPr marL="0" marR="0" marT="0" marB="0">
+                    <a:lnL w="12700" cap="flat" cmpd="sng" algn="ctr">
+                      <a:solidFill>
+                        <a:schemeClr val="tx1"/>
+                      </a:solidFill>
+                      <a:prstDash val="solid"/>
+                      <a:round/>
+                      <a:headEnd type="none" w="med" len="med"/>
+                      <a:tailEnd type="none" w="med" len="med"/>
+                    </a:lnL>
+                    <a:lnR w="12700" cap="flat" cmpd="sng" algn="ctr">
+                      <a:solidFill>
+                        <a:schemeClr val="tx1"/>
+                      </a:solidFill>
+                      <a:prstDash val="solid"/>
+                      <a:round/>
+                      <a:headEnd type="none" w="med" len="med"/>
+                      <a:tailEnd type="none" w="med" len="med"/>
+                    </a:lnR>
+                    <a:lnT w="12700" cap="flat" cmpd="sng" algn="ctr">
+                      <a:solidFill>
+                        <a:schemeClr val="tx1"/>
+                      </a:solidFill>
+                      <a:prstDash val="solid"/>
+                      <a:round/>
+                      <a:headEnd type="none" w="med" len="med"/>
+                      <a:tailEnd type="none" w="med" len="med"/>
+                    </a:lnT>
+                    <a:lnB w="12700" cap="flat" cmpd="sng" algn="ctr">
+                      <a:solidFill>
+                        <a:schemeClr val="tx1"/>
+                      </a:solidFill>
+                      <a:prstDash val="solid"/>
+                      <a:round/>
+                      <a:headEnd type="none" w="med" len="med"/>
+                      <a:tailEnd type="none" w="med" len="med"/>
+                    </a:lnB>
+                    <a:solidFill>
+                      <a:schemeClr val="accent2">
+                        <a:lumMod val="40000"/>
+                        <a:lumOff val="60000"/>
+                      </a:schemeClr>
+                    </a:solidFill>
+                  </a:tcPr>
+                </a:tc>
+                <a:extLst>
+                  <a:ext uri="{0D108BD9-81ED-4DB2-BD59-A6C34878D82A}">
+                    <a16:rowId xmlns:a16="http://schemas.microsoft.com/office/drawing/2014/main" val="2886044501"/>
+                  </a:ext>
+                </a:extLst>
+              </a:tr>
+            </a:tbl>
+          </a:graphicData>
+        </a:graphic>
+      </p:graphicFrame>
+      <p:sp>
+        <p:nvSpPr>
+          <p:cNvPr id="14" name="文本框 13">
+            <a:extLst>
+              <a:ext uri="{FF2B5EF4-FFF2-40B4-BE49-F238E27FC236}">
+                <a16:creationId xmlns:a16="http://schemas.microsoft.com/office/drawing/2014/main" id="{EB06619C-9F56-D01C-0D80-BF5D720DA7A0}"/>
+              </a:ext>
+            </a:extLst>
+          </p:cNvPr>
+          <p:cNvSpPr txBox="1"/>
+          <p:nvPr/>
+        </p:nvSpPr>
+        <p:spPr>
+          <a:xfrm rot="5400000">
+            <a:off x="4236279" y="3365424"/>
+            <a:ext cx="338554" cy="742950"/>
+          </a:xfrm>
+          <a:prstGeom prst="rect">
+            <a:avLst/>
+          </a:prstGeom>
+          <a:noFill/>
+        </p:spPr>
+        <p:txBody>
+          <a:bodyPr vert="vert270" wrap="square" lIns="0" tIns="0" rIns="0" bIns="0" rtlCol="0">
+            <a:spAutoFit/>
+          </a:bodyPr>
+          <a:lstStyle/>
+          <a:p>
+            <a:pPr algn="ctr"/>
+            <a:r>
+              <a:rPr lang="en-US" altLang="zh-CN" sz="1100" dirty="0">
+                <a:latin typeface="Times New Roman" panose="02020603050405020304" pitchFamily="18" charset="0"/>
+                <a:cs typeface="Times New Roman" panose="02020603050405020304" pitchFamily="18" charset="0"/>
+              </a:rPr>
+              <a:t>row</a:t>
+            </a:r>
+          </a:p>
+          <a:p>
+            <a:pPr algn="ctr"/>
+            <a:r>
+              <a:rPr lang="en-US" altLang="zh-CN" sz="1100" dirty="0">
+                <a:latin typeface="Times New Roman" panose="02020603050405020304" pitchFamily="18" charset="0"/>
+                <a:cs typeface="Times New Roman" panose="02020603050405020304" pitchFamily="18" charset="0"/>
+              </a:rPr>
+              <a:t>tile</a:t>
+            </a:r>
+            <a:endParaRPr lang="zh-CN" altLang="en-US" sz="1100" dirty="0">
+              <a:latin typeface="Times New Roman" panose="02020603050405020304" pitchFamily="18" charset="0"/>
+              <a:cs typeface="Times New Roman" panose="02020603050405020304" pitchFamily="18" charset="0"/>
+            </a:endParaRPr>
+          </a:p>
+        </p:txBody>
+      </p:sp>
+      <p:sp>
+        <p:nvSpPr>
+          <p:cNvPr id="16" name="文本框 15">
+            <a:extLst>
+              <a:ext uri="{FF2B5EF4-FFF2-40B4-BE49-F238E27FC236}">
+                <a16:creationId xmlns:a16="http://schemas.microsoft.com/office/drawing/2014/main" id="{7B3E5703-2AF3-8425-F3A2-B00B36EE23D4}"/>
+              </a:ext>
+            </a:extLst>
+          </p:cNvPr>
+          <p:cNvSpPr txBox="1"/>
+          <p:nvPr/>
+        </p:nvSpPr>
+        <p:spPr>
+          <a:xfrm rot="5400000">
+            <a:off x="3698442" y="3396825"/>
+            <a:ext cx="169277" cy="416631"/>
+          </a:xfrm>
+          <a:prstGeom prst="rect">
+            <a:avLst/>
+          </a:prstGeom>
+          <a:noFill/>
+        </p:spPr>
+        <p:txBody>
+          <a:bodyPr vert="vert270" wrap="square" lIns="0" tIns="0" rIns="0" bIns="0" rtlCol="0">
+            <a:spAutoFit/>
+          </a:bodyPr>
+          <a:lstStyle/>
+          <a:p>
+            <a:pPr algn="ctr"/>
+            <a:r>
+              <a:rPr lang="en-US" altLang="zh-CN" sz="1100" dirty="0">
+                <a:latin typeface="Times New Roman" panose="02020603050405020304" pitchFamily="18" charset="0"/>
+                <a:cs typeface="Times New Roman" panose="02020603050405020304" pitchFamily="18" charset="0"/>
+              </a:rPr>
+              <a:t>st2</a:t>
+            </a:r>
+            <a:endParaRPr lang="zh-CN" altLang="en-US" sz="1100" dirty="0">
+              <a:latin typeface="Times New Roman" panose="02020603050405020304" pitchFamily="18" charset="0"/>
+              <a:cs typeface="Times New Roman" panose="02020603050405020304" pitchFamily="18" charset="0"/>
+            </a:endParaRPr>
           </a:p>
         </p:txBody>
       </p:sp>

--- a/source/layout.pptx
+++ b/source/layout.pptx
@@ -259,7 +259,7 @@
           <a:p>
             <a:fld id="{D807E52F-525B-4E79-BB2A-CC4327EEE1A6}" type="datetimeFigureOut">
               <a:rPr lang="zh-CN" altLang="en-US" smtClean="0"/>
-              <a:t>2025/12/16</a:t>
+              <a:t>2025/12/17</a:t>
             </a:fld>
             <a:endParaRPr lang="zh-CN" altLang="en-US"/>
           </a:p>
@@ -457,7 +457,7 @@
           <a:p>
             <a:fld id="{D807E52F-525B-4E79-BB2A-CC4327EEE1A6}" type="datetimeFigureOut">
               <a:rPr lang="zh-CN" altLang="en-US" smtClean="0"/>
-              <a:t>2025/12/16</a:t>
+              <a:t>2025/12/17</a:t>
             </a:fld>
             <a:endParaRPr lang="zh-CN" altLang="en-US"/>
           </a:p>
@@ -665,7 +665,7 @@
           <a:p>
             <a:fld id="{D807E52F-525B-4E79-BB2A-CC4327EEE1A6}" type="datetimeFigureOut">
               <a:rPr lang="zh-CN" altLang="en-US" smtClean="0"/>
-              <a:t>2025/12/16</a:t>
+              <a:t>2025/12/17</a:t>
             </a:fld>
             <a:endParaRPr lang="zh-CN" altLang="en-US"/>
           </a:p>
@@ -863,7 +863,7 @@
           <a:p>
             <a:fld id="{D807E52F-525B-4E79-BB2A-CC4327EEE1A6}" type="datetimeFigureOut">
               <a:rPr lang="zh-CN" altLang="en-US" smtClean="0"/>
-              <a:t>2025/12/16</a:t>
+              <a:t>2025/12/17</a:t>
             </a:fld>
             <a:endParaRPr lang="zh-CN" altLang="en-US"/>
           </a:p>
@@ -1138,7 +1138,7 @@
           <a:p>
             <a:fld id="{D807E52F-525B-4E79-BB2A-CC4327EEE1A6}" type="datetimeFigureOut">
               <a:rPr lang="zh-CN" altLang="en-US" smtClean="0"/>
-              <a:t>2025/12/16</a:t>
+              <a:t>2025/12/17</a:t>
             </a:fld>
             <a:endParaRPr lang="zh-CN" altLang="en-US"/>
           </a:p>
@@ -1403,7 +1403,7 @@
           <a:p>
             <a:fld id="{D807E52F-525B-4E79-BB2A-CC4327EEE1A6}" type="datetimeFigureOut">
               <a:rPr lang="zh-CN" altLang="en-US" smtClean="0"/>
-              <a:t>2025/12/16</a:t>
+              <a:t>2025/12/17</a:t>
             </a:fld>
             <a:endParaRPr lang="zh-CN" altLang="en-US"/>
           </a:p>
@@ -1815,7 +1815,7 @@
           <a:p>
             <a:fld id="{D807E52F-525B-4E79-BB2A-CC4327EEE1A6}" type="datetimeFigureOut">
               <a:rPr lang="zh-CN" altLang="en-US" smtClean="0"/>
-              <a:t>2025/12/16</a:t>
+              <a:t>2025/12/17</a:t>
             </a:fld>
             <a:endParaRPr lang="zh-CN" altLang="en-US"/>
           </a:p>
@@ -1956,7 +1956,7 @@
           <a:p>
             <a:fld id="{D807E52F-525B-4E79-BB2A-CC4327EEE1A6}" type="datetimeFigureOut">
               <a:rPr lang="zh-CN" altLang="en-US" smtClean="0"/>
-              <a:t>2025/12/16</a:t>
+              <a:t>2025/12/17</a:t>
             </a:fld>
             <a:endParaRPr lang="zh-CN" altLang="en-US"/>
           </a:p>
@@ -2069,7 +2069,7 @@
           <a:p>
             <a:fld id="{D807E52F-525B-4E79-BB2A-CC4327EEE1A6}" type="datetimeFigureOut">
               <a:rPr lang="zh-CN" altLang="en-US" smtClean="0"/>
-              <a:t>2025/12/16</a:t>
+              <a:t>2025/12/17</a:t>
             </a:fld>
             <a:endParaRPr lang="zh-CN" altLang="en-US"/>
           </a:p>
@@ -2380,7 +2380,7 @@
           <a:p>
             <a:fld id="{D807E52F-525B-4E79-BB2A-CC4327EEE1A6}" type="datetimeFigureOut">
               <a:rPr lang="zh-CN" altLang="en-US" smtClean="0"/>
-              <a:t>2025/12/16</a:t>
+              <a:t>2025/12/17</a:t>
             </a:fld>
             <a:endParaRPr lang="zh-CN" altLang="en-US"/>
           </a:p>
@@ -2668,7 +2668,7 @@
           <a:p>
             <a:fld id="{D807E52F-525B-4E79-BB2A-CC4327EEE1A6}" type="datetimeFigureOut">
               <a:rPr lang="zh-CN" altLang="en-US" smtClean="0"/>
-              <a:t>2025/12/16</a:t>
+              <a:t>2025/12/17</a:t>
             </a:fld>
             <a:endParaRPr lang="zh-CN" altLang="en-US"/>
           </a:p>
@@ -2909,7 +2909,7 @@
           <a:p>
             <a:fld id="{D807E52F-525B-4E79-BB2A-CC4327EEE1A6}" type="datetimeFigureOut">
               <a:rPr lang="zh-CN" altLang="en-US" smtClean="0"/>
-              <a:t>2025/12/16</a:t>
+              <a:t>2025/12/17</a:t>
             </a:fld>
             <a:endParaRPr lang="zh-CN" altLang="en-US"/>
           </a:p>
@@ -3341,7 +3341,7 @@
           <p:nvPr>
             <p:extLst>
               <p:ext uri="{D42A27DB-BD31-4B8C-83A1-F6EECF244321}">
-                <p14:modId xmlns:p14="http://schemas.microsoft.com/office/powerpoint/2010/main" val="3609523108"/>
+                <p14:modId xmlns:p14="http://schemas.microsoft.com/office/powerpoint/2010/main" val="1826742695"/>
               </p:ext>
             </p:extLst>
           </p:nvPr>
@@ -7253,7 +7253,7 @@
           <p:nvPr>
             <p:extLst>
               <p:ext uri="{D42A27DB-BD31-4B8C-83A1-F6EECF244321}">
-                <p14:modId xmlns:p14="http://schemas.microsoft.com/office/powerpoint/2010/main" val="2165931676"/>
+                <p14:modId xmlns:p14="http://schemas.microsoft.com/office/powerpoint/2010/main" val="166783927"/>
               </p:ext>
             </p:extLst>
           </p:nvPr>
@@ -11435,13 +11435,13 @@
           <p:nvPr>
             <p:extLst>
               <p:ext uri="{D42A27DB-BD31-4B8C-83A1-F6EECF244321}">
-                <p14:modId xmlns:p14="http://schemas.microsoft.com/office/powerpoint/2010/main" val="2312326572"/>
+                <p14:modId xmlns:p14="http://schemas.microsoft.com/office/powerpoint/2010/main" val="3918420114"/>
               </p:ext>
             </p:extLst>
           </p:nvPr>
         </p:nvGraphicFramePr>
         <p:xfrm>
-          <a:off x="2395305" y="2827539"/>
+          <a:off x="2395305" y="2859289"/>
           <a:ext cx="360000" cy="720000"/>
         </p:xfrm>
         <a:graphic>
@@ -11936,7 +11936,7 @@
         </p:nvGrpSpPr>
         <p:grpSpPr>
           <a:xfrm>
-            <a:off x="2417530" y="2822707"/>
+            <a:off x="2417530" y="2854457"/>
             <a:ext cx="304800" cy="724108"/>
             <a:chOff x="4959349" y="1734802"/>
             <a:chExt cx="304800" cy="724108"/>
@@ -12302,13 +12302,13 @@
           <p:nvPr>
             <p:extLst>
               <p:ext uri="{D42A27DB-BD31-4B8C-83A1-F6EECF244321}">
-                <p14:modId xmlns:p14="http://schemas.microsoft.com/office/powerpoint/2010/main" val="2405210607"/>
+                <p14:modId xmlns:p14="http://schemas.microsoft.com/office/powerpoint/2010/main" val="616646133"/>
               </p:ext>
             </p:extLst>
           </p:nvPr>
         </p:nvGraphicFramePr>
         <p:xfrm>
-          <a:off x="2958868" y="2311601"/>
+          <a:off x="2958868" y="2343351"/>
           <a:ext cx="720000" cy="360000"/>
         </p:xfrm>
         <a:graphic>
@@ -12803,7 +12803,7 @@
         </p:nvGrpSpPr>
         <p:grpSpPr>
           <a:xfrm rot="16200000">
-            <a:off x="3137756" y="2152488"/>
+            <a:off x="3137756" y="2184238"/>
             <a:ext cx="350253" cy="678656"/>
             <a:chOff x="4087311" y="2378241"/>
             <a:chExt cx="350253" cy="678656"/>
@@ -13169,13 +13169,13 @@
           <p:nvPr>
             <p:extLst>
               <p:ext uri="{D42A27DB-BD31-4B8C-83A1-F6EECF244321}">
-                <p14:modId xmlns:p14="http://schemas.microsoft.com/office/powerpoint/2010/main" val="2419913572"/>
+                <p14:modId xmlns:p14="http://schemas.microsoft.com/office/powerpoint/2010/main" val="172737143"/>
               </p:ext>
             </p:extLst>
           </p:nvPr>
         </p:nvGraphicFramePr>
         <p:xfrm>
-          <a:off x="2962837" y="2825951"/>
+          <a:off x="2962837" y="2857701"/>
           <a:ext cx="720000" cy="720000"/>
         </p:xfrm>
         <a:graphic>
@@ -14028,7 +14028,7 @@
         </p:nvSpPr>
         <p:spPr>
           <a:xfrm>
-            <a:off x="2960456" y="2825424"/>
+            <a:off x="2960456" y="2857174"/>
             <a:ext cx="720000" cy="180000"/>
           </a:xfrm>
           <a:prstGeom prst="rect">
@@ -14087,7 +14087,7 @@
         </p:nvSpPr>
         <p:spPr>
           <a:xfrm>
-            <a:off x="2960456" y="3003224"/>
+            <a:off x="2960456" y="3034974"/>
             <a:ext cx="720000" cy="180000"/>
           </a:xfrm>
           <a:prstGeom prst="rect">
@@ -14146,7 +14146,7 @@
         </p:nvSpPr>
         <p:spPr>
           <a:xfrm>
-            <a:off x="2961249" y="2831774"/>
+            <a:off x="2961249" y="2863524"/>
             <a:ext cx="180000" cy="720000"/>
           </a:xfrm>
           <a:prstGeom prst="rect">
@@ -14202,7 +14202,7 @@
         </p:nvSpPr>
         <p:spPr>
           <a:xfrm>
-            <a:off x="3142225" y="2827011"/>
+            <a:off x="3142225" y="2858761"/>
             <a:ext cx="180000" cy="720000"/>
           </a:xfrm>
           <a:prstGeom prst="rect">
@@ -14258,7 +14258,7 @@
         </p:nvSpPr>
         <p:spPr>
           <a:xfrm rot="16200000">
-            <a:off x="2798676" y="3734608"/>
+            <a:off x="2798676" y="3766358"/>
             <a:ext cx="502204" cy="169277"/>
           </a:xfrm>
           <a:prstGeom prst="rect">
@@ -14301,7 +14301,7 @@
         </p:nvSpPr>
         <p:spPr>
           <a:xfrm rot="16200000">
-            <a:off x="2979650" y="3732228"/>
+            <a:off x="2979650" y="3763978"/>
             <a:ext cx="502205" cy="169277"/>
           </a:xfrm>
           <a:prstGeom prst="rect">
@@ -14344,7 +14344,7 @@
         </p:nvSpPr>
         <p:spPr>
           <a:xfrm rot="5400000">
-            <a:off x="3848676" y="2655386"/>
+            <a:off x="3848676" y="2687136"/>
             <a:ext cx="169277" cy="497124"/>
           </a:xfrm>
           <a:prstGeom prst="rect">
@@ -14387,7 +14387,7 @@
         </p:nvSpPr>
         <p:spPr>
           <a:xfrm rot="5400000">
-            <a:off x="3851852" y="2837949"/>
+            <a:off x="3851852" y="2869699"/>
             <a:ext cx="169277" cy="497124"/>
           </a:xfrm>
           <a:prstGeom prst="rect">
@@ -14430,7 +14430,7 @@
         </p:nvSpPr>
         <p:spPr>
           <a:xfrm>
-            <a:off x="4197754" y="2867652"/>
+            <a:off x="4197754" y="2899402"/>
             <a:ext cx="104775" cy="295275"/>
           </a:xfrm>
           <a:prstGeom prst="rightBrace">
@@ -14477,7 +14477,7 @@
         </p:nvSpPr>
         <p:spPr>
           <a:xfrm>
-            <a:off x="4358092" y="2929564"/>
+            <a:off x="4358092" y="2961314"/>
             <a:ext cx="319087" cy="176212"/>
           </a:xfrm>
           <a:prstGeom prst="rightArrow">
@@ -14526,7 +14526,7 @@
         </p:nvSpPr>
         <p:spPr>
           <a:xfrm rot="5400000">
-            <a:off x="4407155" y="2640071"/>
+            <a:off x="4407155" y="2671821"/>
             <a:ext cx="169277" cy="416631"/>
           </a:xfrm>
           <a:prstGeom prst="rect">
@@ -14570,13 +14570,13 @@
           <p:nvPr>
             <p:extLst>
               <p:ext uri="{D42A27DB-BD31-4B8C-83A1-F6EECF244321}">
-                <p14:modId xmlns:p14="http://schemas.microsoft.com/office/powerpoint/2010/main" val="739836707"/>
+                <p14:modId xmlns:p14="http://schemas.microsoft.com/office/powerpoint/2010/main" val="3789355255"/>
               </p:ext>
             </p:extLst>
           </p:nvPr>
         </p:nvGraphicFramePr>
         <p:xfrm>
-          <a:off x="4749568" y="2825951"/>
+          <a:off x="4749568" y="2857701"/>
           <a:ext cx="720000" cy="360000"/>
         </p:xfrm>
         <a:graphic>
@@ -14672,7 +14672,7 @@
         </p:nvSpPr>
         <p:spPr>
           <a:xfrm rot="5400000">
-            <a:off x="4937233" y="2632483"/>
+            <a:off x="4937233" y="2664233"/>
             <a:ext cx="338554" cy="742950"/>
           </a:xfrm>
           <a:prstGeom prst="rect">
@@ -14725,7 +14725,7 @@
         </p:nvSpPr>
         <p:spPr>
           <a:xfrm>
-            <a:off x="2356979" y="4020494"/>
+            <a:off x="2356979" y="4052244"/>
             <a:ext cx="3047629" cy="276999"/>
           </a:xfrm>
           <a:prstGeom prst="rect">
@@ -14768,7 +14768,7 @@
         </p:nvSpPr>
         <p:spPr>
           <a:xfrm>
-            <a:off x="3435922" y="3601858"/>
+            <a:off x="3435922" y="3633608"/>
             <a:ext cx="104775" cy="295275"/>
           </a:xfrm>
           <a:prstGeom prst="rightBrace">
@@ -14815,7 +14815,7 @@
         </p:nvSpPr>
         <p:spPr>
           <a:xfrm>
-            <a:off x="3657138" y="3662505"/>
+            <a:off x="3657138" y="3694255"/>
             <a:ext cx="319087" cy="176212"/>
           </a:xfrm>
           <a:prstGeom prst="rightArrow">
@@ -14865,13 +14865,13 @@
           <p:nvPr>
             <p:extLst>
               <p:ext uri="{D42A27DB-BD31-4B8C-83A1-F6EECF244321}">
-                <p14:modId xmlns:p14="http://schemas.microsoft.com/office/powerpoint/2010/main" val="3049027385"/>
+                <p14:modId xmlns:p14="http://schemas.microsoft.com/office/powerpoint/2010/main" val="978169910"/>
               </p:ext>
             </p:extLst>
           </p:nvPr>
         </p:nvGraphicFramePr>
         <p:xfrm>
-          <a:off x="4054964" y="3558892"/>
+          <a:off x="4054964" y="3590642"/>
           <a:ext cx="720000" cy="360000"/>
         </p:xfrm>
         <a:graphic>
@@ -14967,7 +14967,7 @@
         </p:nvSpPr>
         <p:spPr>
           <a:xfrm rot="5400000">
-            <a:off x="4236279" y="3365424"/>
+            <a:off x="4236279" y="3397174"/>
             <a:ext cx="338554" cy="742950"/>
           </a:xfrm>
           <a:prstGeom prst="rect">
@@ -15020,7 +15020,7 @@
         </p:nvSpPr>
         <p:spPr>
           <a:xfrm rot="5400000">
-            <a:off x="3698442" y="3396825"/>
+            <a:off x="3698442" y="3428575"/>
             <a:ext cx="169277" cy="416631"/>
           </a:xfrm>
           <a:prstGeom prst="rect">
